--- a/docs/pptx/whole/ritu-linsubhr-disc-sideeffect.pptx
+++ b/docs/pptx/whole/ritu-linsubhr-disc-sideeffect.pptx
@@ -2443,7 +2443,7 @@
           </p:nvSpPr>
           <p:spPr>
             <a:xfrm>
-              <a:off x="1942521" y="2073503"/>
+              <a:off x="1943067" y="2073503"/>
               <a:ext cx="0" cy="3649639"/>
             </a:xfrm>
             <a:custGeom>
@@ -2486,7 +2486,7 @@
           </p:nvSpPr>
           <p:spPr>
             <a:xfrm>
-              <a:off x="4460699" y="2073503"/>
+              <a:off x="4460487" y="2073503"/>
               <a:ext cx="0" cy="3649639"/>
             </a:xfrm>
             <a:custGeom>
@@ -2529,7 +2529,7 @@
           </p:nvSpPr>
           <p:spPr>
             <a:xfrm>
-              <a:off x="6978877" y="2073503"/>
+              <a:off x="6977907" y="2073503"/>
               <a:ext cx="0" cy="3649639"/>
             </a:xfrm>
             <a:custGeom>
@@ -2787,7 +2787,7 @@
           </p:nvSpPr>
           <p:spPr>
             <a:xfrm>
-              <a:off x="3201610" y="2073503"/>
+              <a:off x="3201777" y="2073503"/>
               <a:ext cx="0" cy="3649639"/>
             </a:xfrm>
             <a:custGeom>
@@ -2830,7 +2830,7 @@
           </p:nvSpPr>
           <p:spPr>
             <a:xfrm>
-              <a:off x="5719788" y="2073503"/>
+              <a:off x="5719197" y="2073503"/>
               <a:ext cx="0" cy="3649639"/>
             </a:xfrm>
             <a:custGeom>
@@ -2873,7 +2873,7 @@
           </p:nvSpPr>
           <p:spPr>
             <a:xfrm>
-              <a:off x="8237966" y="2073503"/>
+              <a:off x="8236616" y="2073503"/>
               <a:ext cx="0" cy="3649639"/>
             </a:xfrm>
             <a:custGeom>
@@ -2917,530 +2917,530 @@
           <p:spPr>
             <a:xfrm>
               <a:off x="1172049" y="2073503"/>
-              <a:ext cx="7090630" cy="3271572"/>
+              <a:ext cx="7090630" cy="3267619"/>
             </a:xfrm>
             <a:custGeom>
               <a:avLst/>
               <a:pathLst>
-                <a:path w="7090630" h="3271572">
+                <a:path w="7090630" h="3267619">
                   <a:moveTo>
-                    <a:pt x="2002510" y="0"/>
+                    <a:pt x="1986231" y="0"/>
                   </a:moveTo>
                   <a:lnTo>
-                    <a:pt x="2005430" y="5696"/>
-                  </a:lnTo>
-                  <a:lnTo>
-                    <a:pt x="2077053" y="140040"/>
-                  </a:lnTo>
-                  <a:lnTo>
-                    <a:pt x="2148675" y="269194"/>
-                  </a:lnTo>
-                  <a:lnTo>
-                    <a:pt x="2220298" y="393359"/>
-                  </a:lnTo>
-                  <a:lnTo>
-                    <a:pt x="2291920" y="512728"/>
-                  </a:lnTo>
-                  <a:lnTo>
-                    <a:pt x="2363543" y="627487"/>
-                  </a:lnTo>
-                  <a:lnTo>
-                    <a:pt x="2435165" y="737813"/>
-                  </a:lnTo>
-                  <a:lnTo>
-                    <a:pt x="2506788" y="843877"/>
-                  </a:lnTo>
-                  <a:lnTo>
-                    <a:pt x="2578410" y="945845"/>
-                  </a:lnTo>
-                  <a:lnTo>
-                    <a:pt x="2650033" y="1043874"/>
-                  </a:lnTo>
-                  <a:lnTo>
-                    <a:pt x="2721655" y="1138116"/>
-                  </a:lnTo>
-                  <a:lnTo>
-                    <a:pt x="2793278" y="1228719"/>
-                  </a:lnTo>
-                  <a:lnTo>
-                    <a:pt x="2864901" y="1315821"/>
-                  </a:lnTo>
-                  <a:lnTo>
-                    <a:pt x="2936523" y="1399560"/>
-                  </a:lnTo>
-                  <a:lnTo>
-                    <a:pt x="3008146" y="1480064"/>
-                  </a:lnTo>
-                  <a:lnTo>
-                    <a:pt x="3079768" y="1557458"/>
-                  </a:lnTo>
-                  <a:lnTo>
-                    <a:pt x="3151391" y="1631863"/>
-                  </a:lnTo>
-                  <a:lnTo>
-                    <a:pt x="3223013" y="1703394"/>
-                  </a:lnTo>
-                  <a:lnTo>
-                    <a:pt x="3294636" y="1772162"/>
-                  </a:lnTo>
-                  <a:lnTo>
-                    <a:pt x="3366258" y="1838273"/>
-                  </a:lnTo>
-                  <a:lnTo>
-                    <a:pt x="3437881" y="1901831"/>
-                  </a:lnTo>
-                  <a:lnTo>
-                    <a:pt x="3509503" y="1962934"/>
-                  </a:lnTo>
-                  <a:lnTo>
-                    <a:pt x="3581126" y="2021677"/>
-                  </a:lnTo>
-                  <a:lnTo>
-                    <a:pt x="3652748" y="2078151"/>
-                  </a:lnTo>
-                  <a:lnTo>
-                    <a:pt x="3724371" y="2132444"/>
-                  </a:lnTo>
-                  <a:lnTo>
-                    <a:pt x="3795993" y="2184639"/>
-                  </a:lnTo>
-                  <a:lnTo>
-                    <a:pt x="3867616" y="2234818"/>
-                  </a:lnTo>
-                  <a:lnTo>
-                    <a:pt x="3939238" y="2283060"/>
-                  </a:lnTo>
-                  <a:lnTo>
-                    <a:pt x="4010861" y="2329437"/>
-                  </a:lnTo>
-                  <a:lnTo>
-                    <a:pt x="4082483" y="2374024"/>
-                  </a:lnTo>
-                  <a:lnTo>
-                    <a:pt x="4154106" y="2416888"/>
-                  </a:lnTo>
-                  <a:lnTo>
-                    <a:pt x="4225729" y="2458096"/>
-                  </a:lnTo>
-                  <a:lnTo>
-                    <a:pt x="4297351" y="2497713"/>
-                  </a:lnTo>
-                  <a:lnTo>
-                    <a:pt x="4368974" y="2535800"/>
-                  </a:lnTo>
-                  <a:lnTo>
-                    <a:pt x="4440596" y="2572415"/>
-                  </a:lnTo>
-                  <a:lnTo>
-                    <a:pt x="4512219" y="2607616"/>
-                  </a:lnTo>
-                  <a:lnTo>
-                    <a:pt x="4583841" y="2641458"/>
-                  </a:lnTo>
-                  <a:lnTo>
-                    <a:pt x="4655464" y="2656513"/>
-                  </a:lnTo>
-                  <a:lnTo>
-                    <a:pt x="4727086" y="2660154"/>
-                  </a:lnTo>
-                  <a:lnTo>
-                    <a:pt x="4798709" y="2663778"/>
-                  </a:lnTo>
-                  <a:lnTo>
-                    <a:pt x="4870331" y="2667387"/>
-                  </a:lnTo>
-                  <a:lnTo>
-                    <a:pt x="4941954" y="2670980"/>
-                  </a:lnTo>
-                  <a:lnTo>
-                    <a:pt x="5013576" y="2674557"/>
-                  </a:lnTo>
-                  <a:lnTo>
-                    <a:pt x="5085199" y="2678118"/>
-                  </a:lnTo>
-                  <a:lnTo>
-                    <a:pt x="5156821" y="2681663"/>
-                  </a:lnTo>
-                  <a:lnTo>
-                    <a:pt x="5228444" y="2685193"/>
-                  </a:lnTo>
-                  <a:lnTo>
-                    <a:pt x="5300066" y="2688707"/>
-                  </a:lnTo>
-                  <a:lnTo>
-                    <a:pt x="5371689" y="2692206"/>
-                  </a:lnTo>
-                  <a:lnTo>
-                    <a:pt x="5443311" y="2695690"/>
-                  </a:lnTo>
-                  <a:lnTo>
-                    <a:pt x="5514934" y="2699158"/>
-                  </a:lnTo>
-                  <a:lnTo>
-                    <a:pt x="5586557" y="2702611"/>
-                  </a:lnTo>
-                  <a:lnTo>
-                    <a:pt x="5658179" y="2706049"/>
-                  </a:lnTo>
-                  <a:lnTo>
-                    <a:pt x="5729802" y="2709471"/>
-                  </a:lnTo>
-                  <a:lnTo>
-                    <a:pt x="5801424" y="2712879"/>
-                  </a:lnTo>
-                  <a:lnTo>
-                    <a:pt x="5873047" y="2716271"/>
-                  </a:lnTo>
-                  <a:lnTo>
-                    <a:pt x="5944669" y="2719649"/>
-                  </a:lnTo>
-                  <a:lnTo>
-                    <a:pt x="6016292" y="2723011"/>
-                  </a:lnTo>
-                  <a:lnTo>
-                    <a:pt x="6087914" y="2726359"/>
-                  </a:lnTo>
-                  <a:lnTo>
-                    <a:pt x="6159537" y="2729693"/>
-                  </a:lnTo>
-                  <a:lnTo>
-                    <a:pt x="6231159" y="2733011"/>
-                  </a:lnTo>
-                  <a:lnTo>
-                    <a:pt x="6302782" y="2736315"/>
-                  </a:lnTo>
-                  <a:lnTo>
-                    <a:pt x="6374404" y="2739604"/>
-                  </a:lnTo>
-                  <a:lnTo>
-                    <a:pt x="6446027" y="2742879"/>
-                  </a:lnTo>
-                  <a:lnTo>
-                    <a:pt x="6517649" y="2746140"/>
-                  </a:lnTo>
-                  <a:lnTo>
-                    <a:pt x="6589272" y="2749386"/>
-                  </a:lnTo>
-                  <a:lnTo>
-                    <a:pt x="6660894" y="2752618"/>
-                  </a:lnTo>
-                  <a:lnTo>
-                    <a:pt x="6732517" y="2755835"/>
-                  </a:lnTo>
-                  <a:lnTo>
-                    <a:pt x="6804139" y="2759039"/>
-                  </a:lnTo>
-                  <a:lnTo>
-                    <a:pt x="6875762" y="2762228"/>
-                  </a:lnTo>
-                  <a:lnTo>
-                    <a:pt x="6947385" y="2765403"/>
-                  </a:lnTo>
-                  <a:lnTo>
-                    <a:pt x="7019007" y="2768565"/>
-                  </a:lnTo>
-                  <a:lnTo>
-                    <a:pt x="7090630" y="2771712"/>
-                  </a:lnTo>
-                  <a:lnTo>
-                    <a:pt x="7090630" y="3271572"/>
-                  </a:lnTo>
-                  <a:lnTo>
-                    <a:pt x="7019007" y="3263047"/>
-                  </a:lnTo>
-                  <a:lnTo>
-                    <a:pt x="6947385" y="3254180"/>
-                  </a:lnTo>
-                  <a:lnTo>
-                    <a:pt x="6875762" y="3244956"/>
-                  </a:lnTo>
-                  <a:lnTo>
-                    <a:pt x="6804139" y="3235362"/>
-                  </a:lnTo>
-                  <a:lnTo>
-                    <a:pt x="6732517" y="3225382"/>
-                  </a:lnTo>
-                  <a:lnTo>
-                    <a:pt x="6660894" y="3215002"/>
-                  </a:lnTo>
-                  <a:lnTo>
-                    <a:pt x="6589272" y="3204204"/>
-                  </a:lnTo>
-                  <a:lnTo>
-                    <a:pt x="6517649" y="3192973"/>
-                  </a:lnTo>
-                  <a:lnTo>
-                    <a:pt x="6446027" y="3181290"/>
-                  </a:lnTo>
-                  <a:lnTo>
-                    <a:pt x="6374404" y="3169138"/>
-                  </a:lnTo>
-                  <a:lnTo>
-                    <a:pt x="6302782" y="3156498"/>
-                  </a:lnTo>
-                  <a:lnTo>
-                    <a:pt x="6231159" y="3143350"/>
-                  </a:lnTo>
-                  <a:lnTo>
-                    <a:pt x="6159537" y="3129673"/>
-                  </a:lnTo>
-                  <a:lnTo>
-                    <a:pt x="6087914" y="3115447"/>
-                  </a:lnTo>
-                  <a:lnTo>
-                    <a:pt x="6016292" y="3100650"/>
-                  </a:lnTo>
-                  <a:lnTo>
-                    <a:pt x="5944669" y="3085258"/>
-                  </a:lnTo>
-                  <a:lnTo>
-                    <a:pt x="5873047" y="3069247"/>
-                  </a:lnTo>
-                  <a:lnTo>
-                    <a:pt x="5801424" y="3052594"/>
-                  </a:lnTo>
-                  <a:lnTo>
-                    <a:pt x="5729802" y="3035271"/>
-                  </a:lnTo>
-                  <a:lnTo>
-                    <a:pt x="5658179" y="3017252"/>
-                  </a:lnTo>
-                  <a:lnTo>
-                    <a:pt x="5586557" y="2998509"/>
-                  </a:lnTo>
-                  <a:lnTo>
-                    <a:pt x="5514934" y="2979013"/>
-                  </a:lnTo>
-                  <a:lnTo>
-                    <a:pt x="5443311" y="2958734"/>
-                  </a:lnTo>
-                  <a:lnTo>
-                    <a:pt x="5371689" y="2937640"/>
-                  </a:lnTo>
-                  <a:lnTo>
-                    <a:pt x="5300066" y="2915699"/>
-                  </a:lnTo>
-                  <a:lnTo>
-                    <a:pt x="5228444" y="2892876"/>
-                  </a:lnTo>
-                  <a:lnTo>
-                    <a:pt x="5156821" y="2869136"/>
-                  </a:lnTo>
-                  <a:lnTo>
-                    <a:pt x="5085199" y="2844442"/>
-                  </a:lnTo>
-                  <a:lnTo>
-                    <a:pt x="5013576" y="2818756"/>
-                  </a:lnTo>
-                  <a:lnTo>
-                    <a:pt x="4941954" y="2792038"/>
-                  </a:lnTo>
-                  <a:lnTo>
-                    <a:pt x="4870331" y="2764247"/>
-                  </a:lnTo>
-                  <a:lnTo>
-                    <a:pt x="4798709" y="2735339"/>
-                  </a:lnTo>
-                  <a:lnTo>
-                    <a:pt x="4727086" y="2705269"/>
-                  </a:lnTo>
-                  <a:lnTo>
-                    <a:pt x="4655464" y="2673992"/>
-                  </a:lnTo>
-                  <a:lnTo>
-                    <a:pt x="4583841" y="2652857"/>
-                  </a:lnTo>
-                  <a:lnTo>
-                    <a:pt x="4512219" y="2649184"/>
-                  </a:lnTo>
-                  <a:lnTo>
-                    <a:pt x="4440596" y="2645495"/>
-                  </a:lnTo>
-                  <a:lnTo>
-                    <a:pt x="4368974" y="2641789"/>
-                  </a:lnTo>
-                  <a:lnTo>
-                    <a:pt x="4297351" y="2638068"/>
-                  </a:lnTo>
-                  <a:lnTo>
-                    <a:pt x="4225729" y="2634329"/>
-                  </a:lnTo>
-                  <a:lnTo>
-                    <a:pt x="4154106" y="2630575"/>
-                  </a:lnTo>
-                  <a:lnTo>
-                    <a:pt x="4082483" y="2626803"/>
-                  </a:lnTo>
-                  <a:lnTo>
-                    <a:pt x="4010861" y="2623015"/>
-                  </a:lnTo>
-                  <a:lnTo>
-                    <a:pt x="3939238" y="2619211"/>
-                  </a:lnTo>
-                  <a:lnTo>
-                    <a:pt x="3867616" y="2615389"/>
-                  </a:lnTo>
-                  <a:lnTo>
-                    <a:pt x="3795993" y="2611551"/>
-                  </a:lnTo>
-                  <a:lnTo>
-                    <a:pt x="3724371" y="2607695"/>
-                  </a:lnTo>
-                  <a:lnTo>
-                    <a:pt x="3652748" y="2603823"/>
-                  </a:lnTo>
-                  <a:lnTo>
-                    <a:pt x="3581126" y="2599933"/>
-                  </a:lnTo>
-                  <a:lnTo>
-                    <a:pt x="3509503" y="2596026"/>
-                  </a:lnTo>
-                  <a:lnTo>
-                    <a:pt x="3437881" y="2592102"/>
-                  </a:lnTo>
-                  <a:lnTo>
-                    <a:pt x="3366258" y="2588161"/>
-                  </a:lnTo>
-                  <a:lnTo>
-                    <a:pt x="3294636" y="2584202"/>
-                  </a:lnTo>
-                  <a:lnTo>
-                    <a:pt x="3223013" y="2580226"/>
-                  </a:lnTo>
-                  <a:lnTo>
-                    <a:pt x="3151391" y="2576232"/>
-                  </a:lnTo>
-                  <a:lnTo>
-                    <a:pt x="3079768" y="2572221"/>
-                  </a:lnTo>
-                  <a:lnTo>
-                    <a:pt x="3008146" y="2568191"/>
-                  </a:lnTo>
-                  <a:lnTo>
-                    <a:pt x="2936523" y="2564144"/>
-                  </a:lnTo>
-                  <a:lnTo>
-                    <a:pt x="2864901" y="2560079"/>
-                  </a:lnTo>
-                  <a:lnTo>
-                    <a:pt x="2793278" y="2555996"/>
-                  </a:lnTo>
-                  <a:lnTo>
-                    <a:pt x="2721655" y="2551895"/>
-                  </a:lnTo>
-                  <a:lnTo>
-                    <a:pt x="2650033" y="2547776"/>
-                  </a:lnTo>
-                  <a:lnTo>
-                    <a:pt x="2578410" y="2543639"/>
-                  </a:lnTo>
-                  <a:lnTo>
-                    <a:pt x="2506788" y="2539483"/>
-                  </a:lnTo>
-                  <a:lnTo>
-                    <a:pt x="2435165" y="2535309"/>
-                  </a:lnTo>
-                  <a:lnTo>
-                    <a:pt x="2363543" y="2531117"/>
-                  </a:lnTo>
-                  <a:lnTo>
-                    <a:pt x="2291920" y="2526906"/>
-                  </a:lnTo>
-                  <a:lnTo>
-                    <a:pt x="2220298" y="2522676"/>
-                  </a:lnTo>
-                  <a:lnTo>
-                    <a:pt x="2148675" y="2518428"/>
-                  </a:lnTo>
-                  <a:lnTo>
-                    <a:pt x="2077053" y="2514161"/>
-                  </a:lnTo>
-                  <a:lnTo>
-                    <a:pt x="2005430" y="2509875"/>
-                  </a:lnTo>
-                  <a:lnTo>
-                    <a:pt x="1933808" y="2505570"/>
-                  </a:lnTo>
-                  <a:lnTo>
-                    <a:pt x="1862185" y="2501246"/>
-                  </a:lnTo>
-                  <a:lnTo>
-                    <a:pt x="1790563" y="2496903"/>
-                  </a:lnTo>
-                  <a:lnTo>
-                    <a:pt x="1718940" y="2492541"/>
-                  </a:lnTo>
-                  <a:lnTo>
-                    <a:pt x="1647318" y="2488160"/>
-                  </a:lnTo>
-                  <a:lnTo>
-                    <a:pt x="1575695" y="2483759"/>
-                  </a:lnTo>
-                  <a:lnTo>
-                    <a:pt x="1504073" y="2479339"/>
-                  </a:lnTo>
-                  <a:lnTo>
-                    <a:pt x="1432450" y="2474899"/>
-                  </a:lnTo>
-                  <a:lnTo>
-                    <a:pt x="1360827" y="2470439"/>
-                  </a:lnTo>
-                  <a:lnTo>
-                    <a:pt x="1289205" y="2465960"/>
-                  </a:lnTo>
-                  <a:lnTo>
-                    <a:pt x="1217582" y="2461461"/>
-                  </a:lnTo>
-                  <a:lnTo>
-                    <a:pt x="1145960" y="2456942"/>
-                  </a:lnTo>
-                  <a:lnTo>
-                    <a:pt x="1074337" y="2452404"/>
-                  </a:lnTo>
-                  <a:lnTo>
-                    <a:pt x="1002715" y="2447845"/>
-                  </a:lnTo>
-                  <a:lnTo>
-                    <a:pt x="931092" y="2443266"/>
-                  </a:lnTo>
-                  <a:lnTo>
-                    <a:pt x="859470" y="2438666"/>
-                  </a:lnTo>
-                  <a:lnTo>
-                    <a:pt x="787847" y="2434047"/>
-                  </a:lnTo>
-                  <a:lnTo>
-                    <a:pt x="716225" y="2429407"/>
-                  </a:lnTo>
-                  <a:lnTo>
-                    <a:pt x="644602" y="2424746"/>
-                  </a:lnTo>
-                  <a:lnTo>
-                    <a:pt x="572980" y="2420065"/>
-                  </a:lnTo>
-                  <a:lnTo>
-                    <a:pt x="501357" y="2415363"/>
-                  </a:lnTo>
-                  <a:lnTo>
-                    <a:pt x="429735" y="2410640"/>
-                  </a:lnTo>
-                  <a:lnTo>
-                    <a:pt x="358112" y="2405897"/>
-                  </a:lnTo>
-                  <a:lnTo>
-                    <a:pt x="286490" y="2401133"/>
-                  </a:lnTo>
-                  <a:lnTo>
-                    <a:pt x="214867" y="2396347"/>
-                  </a:lnTo>
-                  <a:lnTo>
-                    <a:pt x="143245" y="2391540"/>
-                  </a:lnTo>
-                  <a:lnTo>
-                    <a:pt x="71622" y="2386712"/>
-                  </a:lnTo>
-                  <a:lnTo>
-                    <a:pt x="0" y="2381863"/>
+                    <a:pt x="2005430" y="36752"/>
+                  </a:lnTo>
+                  <a:lnTo>
+                    <a:pt x="2077053" y="168616"/>
+                  </a:lnTo>
+                  <a:lnTo>
+                    <a:pt x="2148675" y="295435"/>
+                  </a:lnTo>
+                  <a:lnTo>
+                    <a:pt x="2220298" y="417402"/>
+                  </a:lnTo>
+                  <a:lnTo>
+                    <a:pt x="2291920" y="534704"/>
+                  </a:lnTo>
+                  <a:lnTo>
+                    <a:pt x="2363543" y="647518"/>
+                  </a:lnTo>
+                  <a:lnTo>
+                    <a:pt x="2435165" y="756017"/>
+                  </a:lnTo>
+                  <a:lnTo>
+                    <a:pt x="2506788" y="860365"/>
+                  </a:lnTo>
+                  <a:lnTo>
+                    <a:pt x="2578410" y="960722"/>
+                  </a:lnTo>
+                  <a:lnTo>
+                    <a:pt x="2650033" y="1057239"/>
+                  </a:lnTo>
+                  <a:lnTo>
+                    <a:pt x="2721655" y="1150064"/>
+                  </a:lnTo>
+                  <a:lnTo>
+                    <a:pt x="2793278" y="1239338"/>
+                  </a:lnTo>
+                  <a:lnTo>
+                    <a:pt x="2864901" y="1325197"/>
+                  </a:lnTo>
+                  <a:lnTo>
+                    <a:pt x="2936523" y="1407772"/>
+                  </a:lnTo>
+                  <a:lnTo>
+                    <a:pt x="3008146" y="1487187"/>
+                  </a:lnTo>
+                  <a:lnTo>
+                    <a:pt x="3079768" y="1563565"/>
+                  </a:lnTo>
+                  <a:lnTo>
+                    <a:pt x="3151391" y="1637021"/>
+                  </a:lnTo>
+                  <a:lnTo>
+                    <a:pt x="3223013" y="1707666"/>
+                  </a:lnTo>
+                  <a:lnTo>
+                    <a:pt x="3294636" y="1775609"/>
+                  </a:lnTo>
+                  <a:lnTo>
+                    <a:pt x="3366258" y="1840954"/>
+                  </a:lnTo>
+                  <a:lnTo>
+                    <a:pt x="3437881" y="1903798"/>
+                  </a:lnTo>
+                  <a:lnTo>
+                    <a:pt x="3509503" y="1964238"/>
+                  </a:lnTo>
+                  <a:lnTo>
+                    <a:pt x="3581126" y="2022366"/>
+                  </a:lnTo>
+                  <a:lnTo>
+                    <a:pt x="3652748" y="2078271"/>
+                  </a:lnTo>
+                  <a:lnTo>
+                    <a:pt x="3724371" y="2132037"/>
+                  </a:lnTo>
+                  <a:lnTo>
+                    <a:pt x="3795993" y="2183746"/>
+                  </a:lnTo>
+                  <a:lnTo>
+                    <a:pt x="3867616" y="2233477"/>
+                  </a:lnTo>
+                  <a:lnTo>
+                    <a:pt x="3939238" y="2281305"/>
+                  </a:lnTo>
+                  <a:lnTo>
+                    <a:pt x="4010861" y="2327304"/>
+                  </a:lnTo>
+                  <a:lnTo>
+                    <a:pt x="4082483" y="2371544"/>
+                  </a:lnTo>
+                  <a:lnTo>
+                    <a:pt x="4154106" y="2414090"/>
+                  </a:lnTo>
+                  <a:lnTo>
+                    <a:pt x="4225729" y="2455010"/>
+                  </a:lnTo>
+                  <a:lnTo>
+                    <a:pt x="4297351" y="2494364"/>
+                  </a:lnTo>
+                  <a:lnTo>
+                    <a:pt x="4368974" y="2532212"/>
+                  </a:lnTo>
+                  <a:lnTo>
+                    <a:pt x="4440596" y="2568613"/>
+                  </a:lnTo>
+                  <a:lnTo>
+                    <a:pt x="4512219" y="2603621"/>
+                  </a:lnTo>
+                  <a:lnTo>
+                    <a:pt x="4583841" y="2637290"/>
+                  </a:lnTo>
+                  <a:lnTo>
+                    <a:pt x="4655464" y="2656195"/>
+                  </a:lnTo>
+                  <a:lnTo>
+                    <a:pt x="4727086" y="2660164"/>
+                  </a:lnTo>
+                  <a:lnTo>
+                    <a:pt x="4798709" y="2664113"/>
+                  </a:lnTo>
+                  <a:lnTo>
+                    <a:pt x="4870331" y="2668044"/>
+                  </a:lnTo>
+                  <a:lnTo>
+                    <a:pt x="4941954" y="2671956"/>
+                  </a:lnTo>
+                  <a:lnTo>
+                    <a:pt x="5013576" y="2675849"/>
+                  </a:lnTo>
+                  <a:lnTo>
+                    <a:pt x="5085199" y="2679723"/>
+                  </a:lnTo>
+                  <a:lnTo>
+                    <a:pt x="5156821" y="2683579"/>
+                  </a:lnTo>
+                  <a:lnTo>
+                    <a:pt x="5228444" y="2687416"/>
+                  </a:lnTo>
+                  <a:lnTo>
+                    <a:pt x="5300066" y="2691235"/>
+                  </a:lnTo>
+                  <a:lnTo>
+                    <a:pt x="5371689" y="2695036"/>
+                  </a:lnTo>
+                  <a:lnTo>
+                    <a:pt x="5443311" y="2698818"/>
+                  </a:lnTo>
+                  <a:lnTo>
+                    <a:pt x="5514934" y="2702582"/>
+                  </a:lnTo>
+                  <a:lnTo>
+                    <a:pt x="5586557" y="2706329"/>
+                  </a:lnTo>
+                  <a:lnTo>
+                    <a:pt x="5658179" y="2710057"/>
+                  </a:lnTo>
+                  <a:lnTo>
+                    <a:pt x="5729802" y="2713767"/>
+                  </a:lnTo>
+                  <a:lnTo>
+                    <a:pt x="5801424" y="2717460"/>
+                  </a:lnTo>
+                  <a:lnTo>
+                    <a:pt x="5873047" y="2721135"/>
+                  </a:lnTo>
+                  <a:lnTo>
+                    <a:pt x="5944669" y="2724792"/>
+                  </a:lnTo>
+                  <a:lnTo>
+                    <a:pt x="6016292" y="2728432"/>
+                  </a:lnTo>
+                  <a:lnTo>
+                    <a:pt x="6087914" y="2732054"/>
+                  </a:lnTo>
+                  <a:lnTo>
+                    <a:pt x="6159537" y="2735659"/>
+                  </a:lnTo>
+                  <a:lnTo>
+                    <a:pt x="6231159" y="2739246"/>
+                  </a:lnTo>
+                  <a:lnTo>
+                    <a:pt x="6302782" y="2742817"/>
+                  </a:lnTo>
+                  <a:lnTo>
+                    <a:pt x="6374404" y="2746370"/>
+                  </a:lnTo>
+                  <a:lnTo>
+                    <a:pt x="6446027" y="2749906"/>
+                  </a:lnTo>
+                  <a:lnTo>
+                    <a:pt x="6517649" y="2753425"/>
+                  </a:lnTo>
+                  <a:lnTo>
+                    <a:pt x="6589272" y="2756928"/>
+                  </a:lnTo>
+                  <a:lnTo>
+                    <a:pt x="6660894" y="2760413"/>
+                  </a:lnTo>
+                  <a:lnTo>
+                    <a:pt x="6732517" y="2763882"/>
+                  </a:lnTo>
+                  <a:lnTo>
+                    <a:pt x="6804139" y="2767334"/>
+                  </a:lnTo>
+                  <a:lnTo>
+                    <a:pt x="6875762" y="2770770"/>
+                  </a:lnTo>
+                  <a:lnTo>
+                    <a:pt x="6947385" y="2774189"/>
+                  </a:lnTo>
+                  <a:lnTo>
+                    <a:pt x="7019007" y="2777592"/>
+                  </a:lnTo>
+                  <a:lnTo>
+                    <a:pt x="7090630" y="2780978"/>
+                  </a:lnTo>
+                  <a:lnTo>
+                    <a:pt x="7090630" y="3267619"/>
+                  </a:lnTo>
+                  <a:lnTo>
+                    <a:pt x="7019007" y="3259023"/>
+                  </a:lnTo>
+                  <a:lnTo>
+                    <a:pt x="6947385" y="3250084"/>
+                  </a:lnTo>
+                  <a:lnTo>
+                    <a:pt x="6875762" y="3240790"/>
+                  </a:lnTo>
+                  <a:lnTo>
+                    <a:pt x="6804139" y="3231126"/>
+                  </a:lnTo>
+                  <a:lnTo>
+                    <a:pt x="6732517" y="3221078"/>
+                  </a:lnTo>
+                  <a:lnTo>
+                    <a:pt x="6660894" y="3210630"/>
+                  </a:lnTo>
+                  <a:lnTo>
+                    <a:pt x="6589272" y="3199766"/>
+                  </a:lnTo>
+                  <a:lnTo>
+                    <a:pt x="6517649" y="3188470"/>
+                  </a:lnTo>
+                  <a:lnTo>
+                    <a:pt x="6446027" y="3176726"/>
+                  </a:lnTo>
+                  <a:lnTo>
+                    <a:pt x="6374404" y="3164513"/>
+                  </a:lnTo>
+                  <a:lnTo>
+                    <a:pt x="6302782" y="3151816"/>
+                  </a:lnTo>
+                  <a:lnTo>
+                    <a:pt x="6231159" y="3138613"/>
+                  </a:lnTo>
+                  <a:lnTo>
+                    <a:pt x="6159537" y="3124884"/>
+                  </a:lnTo>
+                  <a:lnTo>
+                    <a:pt x="6087914" y="3110610"/>
+                  </a:lnTo>
+                  <a:lnTo>
+                    <a:pt x="6016292" y="3095768"/>
+                  </a:lnTo>
+                  <a:lnTo>
+                    <a:pt x="5944669" y="3080336"/>
+                  </a:lnTo>
+                  <a:lnTo>
+                    <a:pt x="5873047" y="3064290"/>
+                  </a:lnTo>
+                  <a:lnTo>
+                    <a:pt x="5801424" y="3047605"/>
+                  </a:lnTo>
+                  <a:lnTo>
+                    <a:pt x="5729802" y="3030257"/>
+                  </a:lnTo>
+                  <a:lnTo>
+                    <a:pt x="5658179" y="3012219"/>
+                  </a:lnTo>
+                  <a:lnTo>
+                    <a:pt x="5586557" y="2993464"/>
+                  </a:lnTo>
+                  <a:lnTo>
+                    <a:pt x="5514934" y="2973962"/>
+                  </a:lnTo>
+                  <a:lnTo>
+                    <a:pt x="5443311" y="2953685"/>
+                  </a:lnTo>
+                  <a:lnTo>
+                    <a:pt x="5371689" y="2932601"/>
+                  </a:lnTo>
+                  <a:lnTo>
+                    <a:pt x="5300066" y="2910679"/>
+                  </a:lnTo>
+                  <a:lnTo>
+                    <a:pt x="5228444" y="2887884"/>
+                  </a:lnTo>
+                  <a:lnTo>
+                    <a:pt x="5156821" y="2864183"/>
+                  </a:lnTo>
+                  <a:lnTo>
+                    <a:pt x="5085199" y="2839539"/>
+                  </a:lnTo>
+                  <a:lnTo>
+                    <a:pt x="5013576" y="2813915"/>
+                  </a:lnTo>
+                  <a:lnTo>
+                    <a:pt x="4941954" y="2787272"/>
+                  </a:lnTo>
+                  <a:lnTo>
+                    <a:pt x="4870331" y="2759568"/>
+                  </a:lnTo>
+                  <a:lnTo>
+                    <a:pt x="4798709" y="2730763"/>
+                  </a:lnTo>
+                  <a:lnTo>
+                    <a:pt x="4727086" y="2700813"/>
+                  </a:lnTo>
+                  <a:lnTo>
+                    <a:pt x="4655464" y="2669670"/>
+                  </a:lnTo>
+                  <a:lnTo>
+                    <a:pt x="4583841" y="2652207"/>
+                  </a:lnTo>
+                  <a:lnTo>
+                    <a:pt x="4512219" y="2648200"/>
+                  </a:lnTo>
+                  <a:lnTo>
+                    <a:pt x="4440596" y="2644174"/>
+                  </a:lnTo>
+                  <a:lnTo>
+                    <a:pt x="4368974" y="2640128"/>
+                  </a:lnTo>
+                  <a:lnTo>
+                    <a:pt x="4297351" y="2636063"/>
+                  </a:lnTo>
+                  <a:lnTo>
+                    <a:pt x="4225729" y="2631978"/>
+                  </a:lnTo>
+                  <a:lnTo>
+                    <a:pt x="4154106" y="2627874"/>
+                  </a:lnTo>
+                  <a:lnTo>
+                    <a:pt x="4082483" y="2623749"/>
+                  </a:lnTo>
+                  <a:lnTo>
+                    <a:pt x="4010861" y="2619605"/>
+                  </a:lnTo>
+                  <a:lnTo>
+                    <a:pt x="3939238" y="2615441"/>
+                  </a:lnTo>
+                  <a:lnTo>
+                    <a:pt x="3867616" y="2611257"/>
+                  </a:lnTo>
+                  <a:lnTo>
+                    <a:pt x="3795993" y="2607053"/>
+                  </a:lnTo>
+                  <a:lnTo>
+                    <a:pt x="3724371" y="2602828"/>
+                  </a:lnTo>
+                  <a:lnTo>
+                    <a:pt x="3652748" y="2598583"/>
+                  </a:lnTo>
+                  <a:lnTo>
+                    <a:pt x="3581126" y="2594318"/>
+                  </a:lnTo>
+                  <a:lnTo>
+                    <a:pt x="3509503" y="2590032"/>
+                  </a:lnTo>
+                  <a:lnTo>
+                    <a:pt x="3437881" y="2585725"/>
+                  </a:lnTo>
+                  <a:lnTo>
+                    <a:pt x="3366258" y="2581398"/>
+                  </a:lnTo>
+                  <a:lnTo>
+                    <a:pt x="3294636" y="2577050"/>
+                  </a:lnTo>
+                  <a:lnTo>
+                    <a:pt x="3223013" y="2572680"/>
+                  </a:lnTo>
+                  <a:lnTo>
+                    <a:pt x="3151391" y="2568290"/>
+                  </a:lnTo>
+                  <a:lnTo>
+                    <a:pt x="3079768" y="2563879"/>
+                  </a:lnTo>
+                  <a:lnTo>
+                    <a:pt x="3008146" y="2559446"/>
+                  </a:lnTo>
+                  <a:lnTo>
+                    <a:pt x="2936523" y="2554992"/>
+                  </a:lnTo>
+                  <a:lnTo>
+                    <a:pt x="2864901" y="2550517"/>
+                  </a:lnTo>
+                  <a:lnTo>
+                    <a:pt x="2793278" y="2546020"/>
+                  </a:lnTo>
+                  <a:lnTo>
+                    <a:pt x="2721655" y="2541501"/>
+                  </a:lnTo>
+                  <a:lnTo>
+                    <a:pt x="2650033" y="2536961"/>
+                  </a:lnTo>
+                  <a:lnTo>
+                    <a:pt x="2578410" y="2532398"/>
+                  </a:lnTo>
+                  <a:lnTo>
+                    <a:pt x="2506788" y="2527814"/>
+                  </a:lnTo>
+                  <a:lnTo>
+                    <a:pt x="2435165" y="2523208"/>
+                  </a:lnTo>
+                  <a:lnTo>
+                    <a:pt x="2363543" y="2518579"/>
+                  </a:lnTo>
+                  <a:lnTo>
+                    <a:pt x="2291920" y="2513928"/>
+                  </a:lnTo>
+                  <a:lnTo>
+                    <a:pt x="2220298" y="2509255"/>
+                  </a:lnTo>
+                  <a:lnTo>
+                    <a:pt x="2148675" y="2504559"/>
+                  </a:lnTo>
+                  <a:lnTo>
+                    <a:pt x="2077053" y="2499840"/>
+                  </a:lnTo>
+                  <a:lnTo>
+                    <a:pt x="2005430" y="2495099"/>
+                  </a:lnTo>
+                  <a:lnTo>
+                    <a:pt x="1933808" y="2490335"/>
+                  </a:lnTo>
+                  <a:lnTo>
+                    <a:pt x="1862185" y="2485548"/>
+                  </a:lnTo>
+                  <a:lnTo>
+                    <a:pt x="1790563" y="2480738"/>
+                  </a:lnTo>
+                  <a:lnTo>
+                    <a:pt x="1718940" y="2475905"/>
+                  </a:lnTo>
+                  <a:lnTo>
+                    <a:pt x="1647318" y="2471048"/>
+                  </a:lnTo>
+                  <a:lnTo>
+                    <a:pt x="1575695" y="2466168"/>
+                  </a:lnTo>
+                  <a:lnTo>
+                    <a:pt x="1504073" y="2461265"/>
+                  </a:lnTo>
+                  <a:lnTo>
+                    <a:pt x="1432450" y="2456338"/>
+                  </a:lnTo>
+                  <a:lnTo>
+                    <a:pt x="1360827" y="2451387"/>
+                  </a:lnTo>
+                  <a:lnTo>
+                    <a:pt x="1289205" y="2446412"/>
+                  </a:lnTo>
+                  <a:lnTo>
+                    <a:pt x="1217582" y="2441413"/>
+                  </a:lnTo>
+                  <a:lnTo>
+                    <a:pt x="1145960" y="2436391"/>
+                  </a:lnTo>
+                  <a:lnTo>
+                    <a:pt x="1074337" y="2431344"/>
+                  </a:lnTo>
+                  <a:lnTo>
+                    <a:pt x="1002715" y="2426272"/>
+                  </a:lnTo>
+                  <a:lnTo>
+                    <a:pt x="931092" y="2421177"/>
+                  </a:lnTo>
+                  <a:lnTo>
+                    <a:pt x="859470" y="2416056"/>
+                  </a:lnTo>
+                  <a:lnTo>
+                    <a:pt x="787847" y="2410911"/>
+                  </a:lnTo>
+                  <a:lnTo>
+                    <a:pt x="716225" y="2405742"/>
+                  </a:lnTo>
+                  <a:lnTo>
+                    <a:pt x="644602" y="2400547"/>
+                  </a:lnTo>
+                  <a:lnTo>
+                    <a:pt x="572980" y="2395327"/>
+                  </a:lnTo>
+                  <a:lnTo>
+                    <a:pt x="501357" y="2390083"/>
+                  </a:lnTo>
+                  <a:lnTo>
+                    <a:pt x="429735" y="2384812"/>
+                  </a:lnTo>
+                  <a:lnTo>
+                    <a:pt x="358112" y="2379517"/>
+                  </a:lnTo>
+                  <a:lnTo>
+                    <a:pt x="286490" y="2374196"/>
+                  </a:lnTo>
+                  <a:lnTo>
+                    <a:pt x="214867" y="2368849"/>
+                  </a:lnTo>
+                  <a:lnTo>
+                    <a:pt x="143245" y="2363477"/>
+                  </a:lnTo>
+                  <a:lnTo>
+                    <a:pt x="71622" y="2358079"/>
+                  </a:lnTo>
+                  <a:lnTo>
+                    <a:pt x="0" y="2352654"/>
                   </a:lnTo>
                   <a:close/>
                 </a:path>
@@ -3466,231 +3466,231 @@
           </p:nvSpPr>
           <p:spPr>
             <a:xfrm>
-              <a:off x="3174560" y="2073503"/>
-              <a:ext cx="5088119" cy="2771712"/>
+              <a:off x="3158281" y="2073503"/>
+              <a:ext cx="5104398" cy="2780978"/>
             </a:xfrm>
             <a:custGeom>
               <a:avLst/>
               <a:pathLst>
-                <a:path w="5088119" h="2771712">
+                <a:path w="5104398" h="2780978">
                   <a:moveTo>
                     <a:pt x="0" y="0"/>
                   </a:moveTo>
                   <a:lnTo>
-                    <a:pt x="2919" y="5696"/>
-                  </a:lnTo>
-                  <a:lnTo>
-                    <a:pt x="74542" y="140040"/>
-                  </a:lnTo>
-                  <a:lnTo>
-                    <a:pt x="146164" y="269194"/>
-                  </a:lnTo>
-                  <a:lnTo>
-                    <a:pt x="217787" y="393359"/>
-                  </a:lnTo>
-                  <a:lnTo>
-                    <a:pt x="289409" y="512728"/>
-                  </a:lnTo>
-                  <a:lnTo>
-                    <a:pt x="361032" y="627487"/>
-                  </a:lnTo>
-                  <a:lnTo>
-                    <a:pt x="432654" y="737813"/>
-                  </a:lnTo>
-                  <a:lnTo>
-                    <a:pt x="504277" y="843877"/>
-                  </a:lnTo>
-                  <a:lnTo>
-                    <a:pt x="575900" y="945845"/>
-                  </a:lnTo>
-                  <a:lnTo>
-                    <a:pt x="647522" y="1043874"/>
-                  </a:lnTo>
-                  <a:lnTo>
-                    <a:pt x="719145" y="1138116"/>
-                  </a:lnTo>
-                  <a:lnTo>
-                    <a:pt x="790767" y="1228719"/>
-                  </a:lnTo>
-                  <a:lnTo>
-                    <a:pt x="862390" y="1315821"/>
-                  </a:lnTo>
-                  <a:lnTo>
-                    <a:pt x="934012" y="1399560"/>
-                  </a:lnTo>
-                  <a:lnTo>
-                    <a:pt x="1005635" y="1480064"/>
-                  </a:lnTo>
-                  <a:lnTo>
-                    <a:pt x="1077257" y="1557458"/>
-                  </a:lnTo>
-                  <a:lnTo>
-                    <a:pt x="1148880" y="1631863"/>
-                  </a:lnTo>
-                  <a:lnTo>
-                    <a:pt x="1220502" y="1703394"/>
-                  </a:lnTo>
-                  <a:lnTo>
-                    <a:pt x="1292125" y="1772162"/>
-                  </a:lnTo>
-                  <a:lnTo>
-                    <a:pt x="1363747" y="1838273"/>
-                  </a:lnTo>
-                  <a:lnTo>
-                    <a:pt x="1435370" y="1901831"/>
-                  </a:lnTo>
-                  <a:lnTo>
-                    <a:pt x="1506992" y="1962934"/>
-                  </a:lnTo>
-                  <a:lnTo>
-                    <a:pt x="1578615" y="2021677"/>
-                  </a:lnTo>
-                  <a:lnTo>
-                    <a:pt x="1650237" y="2078151"/>
-                  </a:lnTo>
-                  <a:lnTo>
-                    <a:pt x="1721860" y="2132444"/>
-                  </a:lnTo>
-                  <a:lnTo>
-                    <a:pt x="1793482" y="2184639"/>
-                  </a:lnTo>
-                  <a:lnTo>
-                    <a:pt x="1865105" y="2234818"/>
-                  </a:lnTo>
-                  <a:lnTo>
-                    <a:pt x="1936728" y="2283060"/>
-                  </a:lnTo>
-                  <a:lnTo>
-                    <a:pt x="2008350" y="2329437"/>
-                  </a:lnTo>
-                  <a:lnTo>
-                    <a:pt x="2079973" y="2374024"/>
-                  </a:lnTo>
-                  <a:lnTo>
-                    <a:pt x="2151595" y="2416888"/>
-                  </a:lnTo>
-                  <a:lnTo>
-                    <a:pt x="2223218" y="2458096"/>
-                  </a:lnTo>
-                  <a:lnTo>
-                    <a:pt x="2294840" y="2497713"/>
-                  </a:lnTo>
-                  <a:lnTo>
-                    <a:pt x="2366463" y="2535800"/>
-                  </a:lnTo>
-                  <a:lnTo>
-                    <a:pt x="2438085" y="2572415"/>
-                  </a:lnTo>
-                  <a:lnTo>
-                    <a:pt x="2509708" y="2607616"/>
-                  </a:lnTo>
-                  <a:lnTo>
-                    <a:pt x="2581330" y="2641458"/>
-                  </a:lnTo>
-                  <a:lnTo>
-                    <a:pt x="2652953" y="2656513"/>
-                  </a:lnTo>
-                  <a:lnTo>
-                    <a:pt x="2724575" y="2660154"/>
-                  </a:lnTo>
-                  <a:lnTo>
-                    <a:pt x="2796198" y="2663778"/>
-                  </a:lnTo>
-                  <a:lnTo>
-                    <a:pt x="2867820" y="2667387"/>
-                  </a:lnTo>
-                  <a:lnTo>
-                    <a:pt x="2939443" y="2670980"/>
-                  </a:lnTo>
-                  <a:lnTo>
-                    <a:pt x="3011065" y="2674557"/>
-                  </a:lnTo>
-                  <a:lnTo>
-                    <a:pt x="3082688" y="2678118"/>
-                  </a:lnTo>
-                  <a:lnTo>
-                    <a:pt x="3154310" y="2681663"/>
-                  </a:lnTo>
-                  <a:lnTo>
-                    <a:pt x="3225933" y="2685193"/>
-                  </a:lnTo>
-                  <a:lnTo>
-                    <a:pt x="3297556" y="2688707"/>
-                  </a:lnTo>
-                  <a:lnTo>
-                    <a:pt x="3369178" y="2692206"/>
-                  </a:lnTo>
-                  <a:lnTo>
-                    <a:pt x="3440801" y="2695690"/>
-                  </a:lnTo>
-                  <a:lnTo>
-                    <a:pt x="3512423" y="2699158"/>
-                  </a:lnTo>
-                  <a:lnTo>
-                    <a:pt x="3584046" y="2702611"/>
-                  </a:lnTo>
-                  <a:lnTo>
-                    <a:pt x="3655668" y="2706049"/>
-                  </a:lnTo>
-                  <a:lnTo>
-                    <a:pt x="3727291" y="2709471"/>
-                  </a:lnTo>
-                  <a:lnTo>
-                    <a:pt x="3798913" y="2712879"/>
-                  </a:lnTo>
-                  <a:lnTo>
-                    <a:pt x="3870536" y="2716271"/>
-                  </a:lnTo>
-                  <a:lnTo>
-                    <a:pt x="3942158" y="2719649"/>
-                  </a:lnTo>
-                  <a:lnTo>
-                    <a:pt x="4013781" y="2723011"/>
-                  </a:lnTo>
-                  <a:lnTo>
-                    <a:pt x="4085403" y="2726359"/>
-                  </a:lnTo>
-                  <a:lnTo>
-                    <a:pt x="4157026" y="2729693"/>
-                  </a:lnTo>
-                  <a:lnTo>
-                    <a:pt x="4228648" y="2733011"/>
-                  </a:lnTo>
-                  <a:lnTo>
-                    <a:pt x="4300271" y="2736315"/>
-                  </a:lnTo>
-                  <a:lnTo>
-                    <a:pt x="4371893" y="2739604"/>
-                  </a:lnTo>
-                  <a:lnTo>
-                    <a:pt x="4443516" y="2742879"/>
-                  </a:lnTo>
-                  <a:lnTo>
-                    <a:pt x="4515138" y="2746140"/>
-                  </a:lnTo>
-                  <a:lnTo>
-                    <a:pt x="4586761" y="2749386"/>
-                  </a:lnTo>
-                  <a:lnTo>
-                    <a:pt x="4658384" y="2752618"/>
-                  </a:lnTo>
-                  <a:lnTo>
-                    <a:pt x="4730006" y="2755835"/>
-                  </a:lnTo>
-                  <a:lnTo>
-                    <a:pt x="4801629" y="2759039"/>
-                  </a:lnTo>
-                  <a:lnTo>
-                    <a:pt x="4873251" y="2762228"/>
-                  </a:lnTo>
-                  <a:lnTo>
-                    <a:pt x="4944874" y="2765403"/>
-                  </a:lnTo>
-                  <a:lnTo>
-                    <a:pt x="5016496" y="2768565"/>
-                  </a:lnTo>
-                  <a:lnTo>
-                    <a:pt x="5088119" y="2771712"/>
+                    <a:pt x="19198" y="36752"/>
+                  </a:lnTo>
+                  <a:lnTo>
+                    <a:pt x="90821" y="168616"/>
+                  </a:lnTo>
+                  <a:lnTo>
+                    <a:pt x="162443" y="295435"/>
+                  </a:lnTo>
+                  <a:lnTo>
+                    <a:pt x="234066" y="417402"/>
+                  </a:lnTo>
+                  <a:lnTo>
+                    <a:pt x="305689" y="534704"/>
+                  </a:lnTo>
+                  <a:lnTo>
+                    <a:pt x="377311" y="647518"/>
+                  </a:lnTo>
+                  <a:lnTo>
+                    <a:pt x="448934" y="756017"/>
+                  </a:lnTo>
+                  <a:lnTo>
+                    <a:pt x="520556" y="860365"/>
+                  </a:lnTo>
+                  <a:lnTo>
+                    <a:pt x="592179" y="960722"/>
+                  </a:lnTo>
+                  <a:lnTo>
+                    <a:pt x="663801" y="1057239"/>
+                  </a:lnTo>
+                  <a:lnTo>
+                    <a:pt x="735424" y="1150064"/>
+                  </a:lnTo>
+                  <a:lnTo>
+                    <a:pt x="807046" y="1239338"/>
+                  </a:lnTo>
+                  <a:lnTo>
+                    <a:pt x="878669" y="1325197"/>
+                  </a:lnTo>
+                  <a:lnTo>
+                    <a:pt x="950291" y="1407772"/>
+                  </a:lnTo>
+                  <a:lnTo>
+                    <a:pt x="1021914" y="1487187"/>
+                  </a:lnTo>
+                  <a:lnTo>
+                    <a:pt x="1093536" y="1563565"/>
+                  </a:lnTo>
+                  <a:lnTo>
+                    <a:pt x="1165159" y="1637021"/>
+                  </a:lnTo>
+                  <a:lnTo>
+                    <a:pt x="1236781" y="1707666"/>
+                  </a:lnTo>
+                  <a:lnTo>
+                    <a:pt x="1308404" y="1775609"/>
+                  </a:lnTo>
+                  <a:lnTo>
+                    <a:pt x="1380026" y="1840954"/>
+                  </a:lnTo>
+                  <a:lnTo>
+                    <a:pt x="1451649" y="1903798"/>
+                  </a:lnTo>
+                  <a:lnTo>
+                    <a:pt x="1523271" y="1964238"/>
+                  </a:lnTo>
+                  <a:lnTo>
+                    <a:pt x="1594894" y="2022366"/>
+                  </a:lnTo>
+                  <a:lnTo>
+                    <a:pt x="1666517" y="2078271"/>
+                  </a:lnTo>
+                  <a:lnTo>
+                    <a:pt x="1738139" y="2132037"/>
+                  </a:lnTo>
+                  <a:lnTo>
+                    <a:pt x="1809762" y="2183746"/>
+                  </a:lnTo>
+                  <a:lnTo>
+                    <a:pt x="1881384" y="2233477"/>
+                  </a:lnTo>
+                  <a:lnTo>
+                    <a:pt x="1953007" y="2281305"/>
+                  </a:lnTo>
+                  <a:lnTo>
+                    <a:pt x="2024629" y="2327304"/>
+                  </a:lnTo>
+                  <a:lnTo>
+                    <a:pt x="2096252" y="2371544"/>
+                  </a:lnTo>
+                  <a:lnTo>
+                    <a:pt x="2167874" y="2414090"/>
+                  </a:lnTo>
+                  <a:lnTo>
+                    <a:pt x="2239497" y="2455010"/>
+                  </a:lnTo>
+                  <a:lnTo>
+                    <a:pt x="2311119" y="2494364"/>
+                  </a:lnTo>
+                  <a:lnTo>
+                    <a:pt x="2382742" y="2532212"/>
+                  </a:lnTo>
+                  <a:lnTo>
+                    <a:pt x="2454364" y="2568613"/>
+                  </a:lnTo>
+                  <a:lnTo>
+                    <a:pt x="2525987" y="2603621"/>
+                  </a:lnTo>
+                  <a:lnTo>
+                    <a:pt x="2597609" y="2637290"/>
+                  </a:lnTo>
+                  <a:lnTo>
+                    <a:pt x="2669232" y="2656195"/>
+                  </a:lnTo>
+                  <a:lnTo>
+                    <a:pt x="2740854" y="2660164"/>
+                  </a:lnTo>
+                  <a:lnTo>
+                    <a:pt x="2812477" y="2664113"/>
+                  </a:lnTo>
+                  <a:lnTo>
+                    <a:pt x="2884099" y="2668044"/>
+                  </a:lnTo>
+                  <a:lnTo>
+                    <a:pt x="2955722" y="2671956"/>
+                  </a:lnTo>
+                  <a:lnTo>
+                    <a:pt x="3027345" y="2675849"/>
+                  </a:lnTo>
+                  <a:lnTo>
+                    <a:pt x="3098967" y="2679723"/>
+                  </a:lnTo>
+                  <a:lnTo>
+                    <a:pt x="3170590" y="2683579"/>
+                  </a:lnTo>
+                  <a:lnTo>
+                    <a:pt x="3242212" y="2687416"/>
+                  </a:lnTo>
+                  <a:lnTo>
+                    <a:pt x="3313835" y="2691235"/>
+                  </a:lnTo>
+                  <a:lnTo>
+                    <a:pt x="3385457" y="2695036"/>
+                  </a:lnTo>
+                  <a:lnTo>
+                    <a:pt x="3457080" y="2698818"/>
+                  </a:lnTo>
+                  <a:lnTo>
+                    <a:pt x="3528702" y="2702582"/>
+                  </a:lnTo>
+                  <a:lnTo>
+                    <a:pt x="3600325" y="2706329"/>
+                  </a:lnTo>
+                  <a:lnTo>
+                    <a:pt x="3671947" y="2710057"/>
+                  </a:lnTo>
+                  <a:lnTo>
+                    <a:pt x="3743570" y="2713767"/>
+                  </a:lnTo>
+                  <a:lnTo>
+                    <a:pt x="3815192" y="2717460"/>
+                  </a:lnTo>
+                  <a:lnTo>
+                    <a:pt x="3886815" y="2721135"/>
+                  </a:lnTo>
+                  <a:lnTo>
+                    <a:pt x="3958437" y="2724792"/>
+                  </a:lnTo>
+                  <a:lnTo>
+                    <a:pt x="4030060" y="2728432"/>
+                  </a:lnTo>
+                  <a:lnTo>
+                    <a:pt x="4101682" y="2732054"/>
+                  </a:lnTo>
+                  <a:lnTo>
+                    <a:pt x="4173305" y="2735659"/>
+                  </a:lnTo>
+                  <a:lnTo>
+                    <a:pt x="4244927" y="2739246"/>
+                  </a:lnTo>
+                  <a:lnTo>
+                    <a:pt x="4316550" y="2742817"/>
+                  </a:lnTo>
+                  <a:lnTo>
+                    <a:pt x="4388173" y="2746370"/>
+                  </a:lnTo>
+                  <a:lnTo>
+                    <a:pt x="4459795" y="2749906"/>
+                  </a:lnTo>
+                  <a:lnTo>
+                    <a:pt x="4531418" y="2753425"/>
+                  </a:lnTo>
+                  <a:lnTo>
+                    <a:pt x="4603040" y="2756928"/>
+                  </a:lnTo>
+                  <a:lnTo>
+                    <a:pt x="4674663" y="2760413"/>
+                  </a:lnTo>
+                  <a:lnTo>
+                    <a:pt x="4746285" y="2763882"/>
+                  </a:lnTo>
+                  <a:lnTo>
+                    <a:pt x="4817908" y="2767334"/>
+                  </a:lnTo>
+                  <a:lnTo>
+                    <a:pt x="4889530" y="2770770"/>
+                  </a:lnTo>
+                  <a:lnTo>
+                    <a:pt x="4961153" y="2774189"/>
+                  </a:lnTo>
+                  <a:lnTo>
+                    <a:pt x="5032775" y="2777592"/>
+                  </a:lnTo>
+                  <a:lnTo>
+                    <a:pt x="5104398" y="2780978"/>
                   </a:lnTo>
                 </a:path>
               </a:pathLst>
@@ -3710,309 +3710,309 @@
           </p:nvSpPr>
           <p:spPr>
             <a:xfrm>
-              <a:off x="1172049" y="4455366"/>
-              <a:ext cx="7090630" cy="889708"/>
+              <a:off x="1172049" y="4426157"/>
+              <a:ext cx="7090630" cy="914965"/>
             </a:xfrm>
             <a:custGeom>
               <a:avLst/>
               <a:pathLst>
-                <a:path w="7090630" h="889708">
+                <a:path w="7090630" h="914965">
                   <a:moveTo>
-                    <a:pt x="7090630" y="889708"/>
+                    <a:pt x="7090630" y="914965"/>
                   </a:moveTo>
                   <a:lnTo>
-                    <a:pt x="7019007" y="881183"/>
-                  </a:lnTo>
-                  <a:lnTo>
-                    <a:pt x="6947385" y="872316"/>
-                  </a:lnTo>
-                  <a:lnTo>
-                    <a:pt x="6875762" y="863092"/>
-                  </a:lnTo>
-                  <a:lnTo>
-                    <a:pt x="6804139" y="853498"/>
-                  </a:lnTo>
-                  <a:lnTo>
-                    <a:pt x="6732517" y="843519"/>
-                  </a:lnTo>
-                  <a:lnTo>
-                    <a:pt x="6660894" y="833138"/>
-                  </a:lnTo>
-                  <a:lnTo>
-                    <a:pt x="6589272" y="822341"/>
-                  </a:lnTo>
-                  <a:lnTo>
-                    <a:pt x="6517649" y="811109"/>
-                  </a:lnTo>
-                  <a:lnTo>
-                    <a:pt x="6446027" y="799427"/>
-                  </a:lnTo>
-                  <a:lnTo>
-                    <a:pt x="6374404" y="787274"/>
-                  </a:lnTo>
-                  <a:lnTo>
-                    <a:pt x="6302782" y="774634"/>
-                  </a:lnTo>
-                  <a:lnTo>
-                    <a:pt x="6231159" y="761486"/>
-                  </a:lnTo>
-                  <a:lnTo>
-                    <a:pt x="6159537" y="747810"/>
-                  </a:lnTo>
-                  <a:lnTo>
-                    <a:pt x="6087914" y="733584"/>
-                  </a:lnTo>
-                  <a:lnTo>
-                    <a:pt x="6016292" y="718786"/>
-                  </a:lnTo>
-                  <a:lnTo>
-                    <a:pt x="5944669" y="703394"/>
-                  </a:lnTo>
-                  <a:lnTo>
-                    <a:pt x="5873047" y="687384"/>
-                  </a:lnTo>
-                  <a:lnTo>
-                    <a:pt x="5801424" y="670730"/>
-                  </a:lnTo>
-                  <a:lnTo>
-                    <a:pt x="5729802" y="653407"/>
-                  </a:lnTo>
-                  <a:lnTo>
-                    <a:pt x="5658179" y="635388"/>
-                  </a:lnTo>
-                  <a:lnTo>
-                    <a:pt x="5586557" y="616646"/>
-                  </a:lnTo>
-                  <a:lnTo>
-                    <a:pt x="5514934" y="597150"/>
-                  </a:lnTo>
-                  <a:lnTo>
-                    <a:pt x="5443311" y="576871"/>
-                  </a:lnTo>
-                  <a:lnTo>
-                    <a:pt x="5371689" y="555777"/>
-                  </a:lnTo>
-                  <a:lnTo>
-                    <a:pt x="5300066" y="533835"/>
-                  </a:lnTo>
-                  <a:lnTo>
-                    <a:pt x="5228444" y="511012"/>
-                  </a:lnTo>
-                  <a:lnTo>
-                    <a:pt x="5156821" y="487272"/>
-                  </a:lnTo>
-                  <a:lnTo>
-                    <a:pt x="5085199" y="462579"/>
-                  </a:lnTo>
-                  <a:lnTo>
-                    <a:pt x="5013576" y="436893"/>
-                  </a:lnTo>
-                  <a:lnTo>
-                    <a:pt x="4941954" y="410175"/>
-                  </a:lnTo>
-                  <a:lnTo>
-                    <a:pt x="4870331" y="382383"/>
-                  </a:lnTo>
-                  <a:lnTo>
-                    <a:pt x="4798709" y="353475"/>
-                  </a:lnTo>
-                  <a:lnTo>
-                    <a:pt x="4727086" y="323406"/>
-                  </a:lnTo>
-                  <a:lnTo>
-                    <a:pt x="4655464" y="292128"/>
-                  </a:lnTo>
-                  <a:lnTo>
-                    <a:pt x="4583841" y="270993"/>
-                  </a:lnTo>
-                  <a:lnTo>
-                    <a:pt x="4512219" y="267320"/>
-                  </a:lnTo>
-                  <a:lnTo>
-                    <a:pt x="4440596" y="263631"/>
-                  </a:lnTo>
-                  <a:lnTo>
-                    <a:pt x="4368974" y="259926"/>
-                  </a:lnTo>
-                  <a:lnTo>
-                    <a:pt x="4297351" y="256204"/>
-                  </a:lnTo>
-                  <a:lnTo>
-                    <a:pt x="4225729" y="252466"/>
-                  </a:lnTo>
-                  <a:lnTo>
-                    <a:pt x="4154106" y="248711"/>
-                  </a:lnTo>
-                  <a:lnTo>
-                    <a:pt x="4082483" y="244940"/>
-                  </a:lnTo>
-                  <a:lnTo>
-                    <a:pt x="4010861" y="241152"/>
-                  </a:lnTo>
-                  <a:lnTo>
-                    <a:pt x="3939238" y="237347"/>
-                  </a:lnTo>
-                  <a:lnTo>
-                    <a:pt x="3867616" y="233526"/>
-                  </a:lnTo>
-                  <a:lnTo>
-                    <a:pt x="3795993" y="229687"/>
-                  </a:lnTo>
-                  <a:lnTo>
-                    <a:pt x="3724371" y="225832"/>
-                  </a:lnTo>
-                  <a:lnTo>
-                    <a:pt x="3652748" y="221959"/>
-                  </a:lnTo>
-                  <a:lnTo>
-                    <a:pt x="3581126" y="218070"/>
-                  </a:lnTo>
-                  <a:lnTo>
-                    <a:pt x="3509503" y="214163"/>
-                  </a:lnTo>
-                  <a:lnTo>
-                    <a:pt x="3437881" y="210239"/>
-                  </a:lnTo>
-                  <a:lnTo>
-                    <a:pt x="3366258" y="206297"/>
-                  </a:lnTo>
-                  <a:lnTo>
-                    <a:pt x="3294636" y="202339"/>
-                  </a:lnTo>
-                  <a:lnTo>
-                    <a:pt x="3223013" y="198362"/>
-                  </a:lnTo>
-                  <a:lnTo>
-                    <a:pt x="3151391" y="194369"/>
-                  </a:lnTo>
-                  <a:lnTo>
-                    <a:pt x="3079768" y="190357"/>
-                  </a:lnTo>
-                  <a:lnTo>
-                    <a:pt x="3008146" y="186328"/>
-                  </a:lnTo>
-                  <a:lnTo>
-                    <a:pt x="2936523" y="182281"/>
-                  </a:lnTo>
-                  <a:lnTo>
-                    <a:pt x="2864901" y="178216"/>
-                  </a:lnTo>
-                  <a:lnTo>
-                    <a:pt x="2793278" y="174133"/>
-                  </a:lnTo>
-                  <a:lnTo>
-                    <a:pt x="2721655" y="170032"/>
-                  </a:lnTo>
-                  <a:lnTo>
-                    <a:pt x="2650033" y="165913"/>
-                  </a:lnTo>
-                  <a:lnTo>
-                    <a:pt x="2578410" y="161775"/>
-                  </a:lnTo>
-                  <a:lnTo>
-                    <a:pt x="2506788" y="157620"/>
-                  </a:lnTo>
-                  <a:lnTo>
-                    <a:pt x="2435165" y="153446"/>
-                  </a:lnTo>
-                  <a:lnTo>
-                    <a:pt x="2363543" y="149253"/>
-                  </a:lnTo>
-                  <a:lnTo>
-                    <a:pt x="2291920" y="145042"/>
-                  </a:lnTo>
-                  <a:lnTo>
-                    <a:pt x="2220298" y="140813"/>
-                  </a:lnTo>
-                  <a:lnTo>
-                    <a:pt x="2148675" y="136565"/>
-                  </a:lnTo>
-                  <a:lnTo>
-                    <a:pt x="2077053" y="132298"/>
-                  </a:lnTo>
-                  <a:lnTo>
-                    <a:pt x="2005430" y="128012"/>
-                  </a:lnTo>
-                  <a:lnTo>
-                    <a:pt x="1933808" y="123707"/>
-                  </a:lnTo>
-                  <a:lnTo>
-                    <a:pt x="1862185" y="119383"/>
-                  </a:lnTo>
-                  <a:lnTo>
-                    <a:pt x="1790563" y="115040"/>
-                  </a:lnTo>
-                  <a:lnTo>
-                    <a:pt x="1718940" y="110678"/>
-                  </a:lnTo>
-                  <a:lnTo>
-                    <a:pt x="1647318" y="106296"/>
-                  </a:lnTo>
-                  <a:lnTo>
-                    <a:pt x="1575695" y="101895"/>
-                  </a:lnTo>
-                  <a:lnTo>
-                    <a:pt x="1504073" y="97475"/>
-                  </a:lnTo>
-                  <a:lnTo>
-                    <a:pt x="1432450" y="93035"/>
-                  </a:lnTo>
-                  <a:lnTo>
-                    <a:pt x="1360827" y="88576"/>
-                  </a:lnTo>
-                  <a:lnTo>
-                    <a:pt x="1289205" y="84097"/>
-                  </a:lnTo>
-                  <a:lnTo>
-                    <a:pt x="1217582" y="79598"/>
-                  </a:lnTo>
-                  <a:lnTo>
-                    <a:pt x="1145960" y="75079"/>
-                  </a:lnTo>
-                  <a:lnTo>
-                    <a:pt x="1074337" y="70540"/>
-                  </a:lnTo>
-                  <a:lnTo>
-                    <a:pt x="1002715" y="65981"/>
-                  </a:lnTo>
-                  <a:lnTo>
-                    <a:pt x="931092" y="61402"/>
-                  </a:lnTo>
-                  <a:lnTo>
-                    <a:pt x="859470" y="56803"/>
-                  </a:lnTo>
-                  <a:lnTo>
-                    <a:pt x="787847" y="52183"/>
-                  </a:lnTo>
-                  <a:lnTo>
-                    <a:pt x="716225" y="47543"/>
-                  </a:lnTo>
-                  <a:lnTo>
-                    <a:pt x="644602" y="42883"/>
-                  </a:lnTo>
-                  <a:lnTo>
-                    <a:pt x="572980" y="38201"/>
-                  </a:lnTo>
-                  <a:lnTo>
-                    <a:pt x="501357" y="33500"/>
-                  </a:lnTo>
-                  <a:lnTo>
-                    <a:pt x="429735" y="28777"/>
-                  </a:lnTo>
-                  <a:lnTo>
-                    <a:pt x="358112" y="24033"/>
-                  </a:lnTo>
-                  <a:lnTo>
-                    <a:pt x="286490" y="19269"/>
-                  </a:lnTo>
-                  <a:lnTo>
-                    <a:pt x="214867" y="14483"/>
-                  </a:lnTo>
-                  <a:lnTo>
-                    <a:pt x="143245" y="9677"/>
-                  </a:lnTo>
-                  <a:lnTo>
-                    <a:pt x="71622" y="4849"/>
+                    <a:pt x="7019007" y="906368"/>
+                  </a:lnTo>
+                  <a:lnTo>
+                    <a:pt x="6947385" y="897429"/>
+                  </a:lnTo>
+                  <a:lnTo>
+                    <a:pt x="6875762" y="888135"/>
+                  </a:lnTo>
+                  <a:lnTo>
+                    <a:pt x="6804139" y="878471"/>
+                  </a:lnTo>
+                  <a:lnTo>
+                    <a:pt x="6732517" y="868423"/>
+                  </a:lnTo>
+                  <a:lnTo>
+                    <a:pt x="6660894" y="857975"/>
+                  </a:lnTo>
+                  <a:lnTo>
+                    <a:pt x="6589272" y="847111"/>
+                  </a:lnTo>
+                  <a:lnTo>
+                    <a:pt x="6517649" y="835816"/>
+                  </a:lnTo>
+                  <a:lnTo>
+                    <a:pt x="6446027" y="824071"/>
+                  </a:lnTo>
+                  <a:lnTo>
+                    <a:pt x="6374404" y="811859"/>
+                  </a:lnTo>
+                  <a:lnTo>
+                    <a:pt x="6302782" y="799161"/>
+                  </a:lnTo>
+                  <a:lnTo>
+                    <a:pt x="6231159" y="785958"/>
+                  </a:lnTo>
+                  <a:lnTo>
+                    <a:pt x="6159537" y="772230"/>
+                  </a:lnTo>
+                  <a:lnTo>
+                    <a:pt x="6087914" y="757956"/>
+                  </a:lnTo>
+                  <a:lnTo>
+                    <a:pt x="6016292" y="743114"/>
+                  </a:lnTo>
+                  <a:lnTo>
+                    <a:pt x="5944669" y="727681"/>
+                  </a:lnTo>
+                  <a:lnTo>
+                    <a:pt x="5873047" y="711635"/>
+                  </a:lnTo>
+                  <a:lnTo>
+                    <a:pt x="5801424" y="694951"/>
+                  </a:lnTo>
+                  <a:lnTo>
+                    <a:pt x="5729802" y="677603"/>
+                  </a:lnTo>
+                  <a:lnTo>
+                    <a:pt x="5658179" y="659565"/>
+                  </a:lnTo>
+                  <a:lnTo>
+                    <a:pt x="5586557" y="640809"/>
+                  </a:lnTo>
+                  <a:lnTo>
+                    <a:pt x="5514934" y="621308"/>
+                  </a:lnTo>
+                  <a:lnTo>
+                    <a:pt x="5443311" y="601030"/>
+                  </a:lnTo>
+                  <a:lnTo>
+                    <a:pt x="5371689" y="579946"/>
+                  </a:lnTo>
+                  <a:lnTo>
+                    <a:pt x="5300066" y="558024"/>
+                  </a:lnTo>
+                  <a:lnTo>
+                    <a:pt x="5228444" y="535229"/>
+                  </a:lnTo>
+                  <a:lnTo>
+                    <a:pt x="5156821" y="511528"/>
+                  </a:lnTo>
+                  <a:lnTo>
+                    <a:pt x="5085199" y="486884"/>
+                  </a:lnTo>
+                  <a:lnTo>
+                    <a:pt x="5013576" y="461260"/>
+                  </a:lnTo>
+                  <a:lnTo>
+                    <a:pt x="4941954" y="434617"/>
+                  </a:lnTo>
+                  <a:lnTo>
+                    <a:pt x="4870331" y="406914"/>
+                  </a:lnTo>
+                  <a:lnTo>
+                    <a:pt x="4798709" y="378109"/>
+                  </a:lnTo>
+                  <a:lnTo>
+                    <a:pt x="4727086" y="348158"/>
+                  </a:lnTo>
+                  <a:lnTo>
+                    <a:pt x="4655464" y="317016"/>
+                  </a:lnTo>
+                  <a:lnTo>
+                    <a:pt x="4583841" y="299552"/>
+                  </a:lnTo>
+                  <a:lnTo>
+                    <a:pt x="4512219" y="295545"/>
+                  </a:lnTo>
+                  <a:lnTo>
+                    <a:pt x="4440596" y="291519"/>
+                  </a:lnTo>
+                  <a:lnTo>
+                    <a:pt x="4368974" y="287473"/>
+                  </a:lnTo>
+                  <a:lnTo>
+                    <a:pt x="4297351" y="283408"/>
+                  </a:lnTo>
+                  <a:lnTo>
+                    <a:pt x="4225729" y="279323"/>
+                  </a:lnTo>
+                  <a:lnTo>
+                    <a:pt x="4154106" y="275219"/>
+                  </a:lnTo>
+                  <a:lnTo>
+                    <a:pt x="4082483" y="271095"/>
+                  </a:lnTo>
+                  <a:lnTo>
+                    <a:pt x="4010861" y="266951"/>
+                  </a:lnTo>
+                  <a:lnTo>
+                    <a:pt x="3939238" y="262786"/>
+                  </a:lnTo>
+                  <a:lnTo>
+                    <a:pt x="3867616" y="258602"/>
+                  </a:lnTo>
+                  <a:lnTo>
+                    <a:pt x="3795993" y="254398"/>
+                  </a:lnTo>
+                  <a:lnTo>
+                    <a:pt x="3724371" y="250173"/>
+                  </a:lnTo>
+                  <a:lnTo>
+                    <a:pt x="3652748" y="245928"/>
+                  </a:lnTo>
+                  <a:lnTo>
+                    <a:pt x="3581126" y="241663"/>
+                  </a:lnTo>
+                  <a:lnTo>
+                    <a:pt x="3509503" y="237377"/>
+                  </a:lnTo>
+                  <a:lnTo>
+                    <a:pt x="3437881" y="233071"/>
+                  </a:lnTo>
+                  <a:lnTo>
+                    <a:pt x="3366258" y="228743"/>
+                  </a:lnTo>
+                  <a:lnTo>
+                    <a:pt x="3294636" y="224395"/>
+                  </a:lnTo>
+                  <a:lnTo>
+                    <a:pt x="3223013" y="220026"/>
+                  </a:lnTo>
+                  <a:lnTo>
+                    <a:pt x="3151391" y="215636"/>
+                  </a:lnTo>
+                  <a:lnTo>
+                    <a:pt x="3079768" y="211224"/>
+                  </a:lnTo>
+                  <a:lnTo>
+                    <a:pt x="3008146" y="206792"/>
+                  </a:lnTo>
+                  <a:lnTo>
+                    <a:pt x="2936523" y="202338"/>
+                  </a:lnTo>
+                  <a:lnTo>
+                    <a:pt x="2864901" y="197862"/>
+                  </a:lnTo>
+                  <a:lnTo>
+                    <a:pt x="2793278" y="193365"/>
+                  </a:lnTo>
+                  <a:lnTo>
+                    <a:pt x="2721655" y="188846"/>
+                  </a:lnTo>
+                  <a:lnTo>
+                    <a:pt x="2650033" y="184306"/>
+                  </a:lnTo>
+                  <a:lnTo>
+                    <a:pt x="2578410" y="179744"/>
+                  </a:lnTo>
+                  <a:lnTo>
+                    <a:pt x="2506788" y="175159"/>
+                  </a:lnTo>
+                  <a:lnTo>
+                    <a:pt x="2435165" y="170553"/>
+                  </a:lnTo>
+                  <a:lnTo>
+                    <a:pt x="2363543" y="165924"/>
+                  </a:lnTo>
+                  <a:lnTo>
+                    <a:pt x="2291920" y="161273"/>
+                  </a:lnTo>
+                  <a:lnTo>
+                    <a:pt x="2220298" y="156600"/>
+                  </a:lnTo>
+                  <a:lnTo>
+                    <a:pt x="2148675" y="151904"/>
+                  </a:lnTo>
+                  <a:lnTo>
+                    <a:pt x="2077053" y="147186"/>
+                  </a:lnTo>
+                  <a:lnTo>
+                    <a:pt x="2005430" y="142445"/>
+                  </a:lnTo>
+                  <a:lnTo>
+                    <a:pt x="1933808" y="137680"/>
+                  </a:lnTo>
+                  <a:lnTo>
+                    <a:pt x="1862185" y="132893"/>
+                  </a:lnTo>
+                  <a:lnTo>
+                    <a:pt x="1790563" y="128083"/>
+                  </a:lnTo>
+                  <a:lnTo>
+                    <a:pt x="1718940" y="123250"/>
+                  </a:lnTo>
+                  <a:lnTo>
+                    <a:pt x="1647318" y="118394"/>
+                  </a:lnTo>
+                  <a:lnTo>
+                    <a:pt x="1575695" y="113514"/>
+                  </a:lnTo>
+                  <a:lnTo>
+                    <a:pt x="1504073" y="108610"/>
+                  </a:lnTo>
+                  <a:lnTo>
+                    <a:pt x="1432450" y="103683"/>
+                  </a:lnTo>
+                  <a:lnTo>
+                    <a:pt x="1360827" y="98732"/>
+                  </a:lnTo>
+                  <a:lnTo>
+                    <a:pt x="1289205" y="93757"/>
+                  </a:lnTo>
+                  <a:lnTo>
+                    <a:pt x="1217582" y="88759"/>
+                  </a:lnTo>
+                  <a:lnTo>
+                    <a:pt x="1145960" y="83736"/>
+                  </a:lnTo>
+                  <a:lnTo>
+                    <a:pt x="1074337" y="78689"/>
+                  </a:lnTo>
+                  <a:lnTo>
+                    <a:pt x="1002715" y="73618"/>
+                  </a:lnTo>
+                  <a:lnTo>
+                    <a:pt x="931092" y="68522"/>
+                  </a:lnTo>
+                  <a:lnTo>
+                    <a:pt x="859470" y="63402"/>
+                  </a:lnTo>
+                  <a:lnTo>
+                    <a:pt x="787847" y="58257"/>
+                  </a:lnTo>
+                  <a:lnTo>
+                    <a:pt x="716225" y="53087"/>
+                  </a:lnTo>
+                  <a:lnTo>
+                    <a:pt x="644602" y="47892"/>
+                  </a:lnTo>
+                  <a:lnTo>
+                    <a:pt x="572980" y="42673"/>
+                  </a:lnTo>
+                  <a:lnTo>
+                    <a:pt x="501357" y="37428"/>
+                  </a:lnTo>
+                  <a:lnTo>
+                    <a:pt x="429735" y="32158"/>
+                  </a:lnTo>
+                  <a:lnTo>
+                    <a:pt x="358112" y="26862"/>
+                  </a:lnTo>
+                  <a:lnTo>
+                    <a:pt x="286490" y="21541"/>
+                  </a:lnTo>
+                  <a:lnTo>
+                    <a:pt x="214867" y="16195"/>
+                  </a:lnTo>
+                  <a:lnTo>
+                    <a:pt x="143245" y="10822"/>
+                  </a:lnTo>
+                  <a:lnTo>
+                    <a:pt x="71622" y="5424"/>
                   </a:lnTo>
                   <a:lnTo>
                     <a:pt x="0" y="0"/>
@@ -4035,312 +4035,312 @@
           </p:nvSpPr>
           <p:spPr>
             <a:xfrm>
-              <a:off x="1172049" y="2159099"/>
-              <a:ext cx="7090630" cy="3009465"/>
+              <a:off x="1172049" y="2148245"/>
+              <a:ext cx="7090630" cy="3019277"/>
             </a:xfrm>
             <a:custGeom>
               <a:avLst/>
               <a:pathLst>
-                <a:path w="7090630" h="3009465">
+                <a:path w="7090630" h="3019277">
                   <a:moveTo>
                     <a:pt x="0" y="0"/>
                   </a:moveTo>
                   <a:lnTo>
-                    <a:pt x="71622" y="73614"/>
-                  </a:lnTo>
-                  <a:lnTo>
-                    <a:pt x="143245" y="145634"/>
-                  </a:lnTo>
-                  <a:lnTo>
-                    <a:pt x="214867" y="216093"/>
-                  </a:lnTo>
-                  <a:lnTo>
-                    <a:pt x="286490" y="285027"/>
-                  </a:lnTo>
-                  <a:lnTo>
-                    <a:pt x="358112" y="352466"/>
-                  </a:lnTo>
-                  <a:lnTo>
-                    <a:pt x="429735" y="418445"/>
-                  </a:lnTo>
-                  <a:lnTo>
-                    <a:pt x="501357" y="482995"/>
-                  </a:lnTo>
-                  <a:lnTo>
-                    <a:pt x="572980" y="546146"/>
-                  </a:lnTo>
-                  <a:lnTo>
-                    <a:pt x="644602" y="607930"/>
-                  </a:lnTo>
-                  <a:lnTo>
-                    <a:pt x="716225" y="668374"/>
-                  </a:lnTo>
-                  <a:lnTo>
-                    <a:pt x="787847" y="727510"/>
-                  </a:lnTo>
-                  <a:lnTo>
-                    <a:pt x="859470" y="785364"/>
-                  </a:lnTo>
-                  <a:lnTo>
-                    <a:pt x="931092" y="841965"/>
-                  </a:lnTo>
-                  <a:lnTo>
-                    <a:pt x="1002715" y="897340"/>
-                  </a:lnTo>
-                  <a:lnTo>
-                    <a:pt x="1074337" y="951515"/>
-                  </a:lnTo>
-                  <a:lnTo>
-                    <a:pt x="1145960" y="1004517"/>
-                  </a:lnTo>
-                  <a:lnTo>
-                    <a:pt x="1217582" y="1056371"/>
-                  </a:lnTo>
-                  <a:lnTo>
-                    <a:pt x="1289205" y="1107101"/>
-                  </a:lnTo>
-                  <a:lnTo>
-                    <a:pt x="1360827" y="1156732"/>
-                  </a:lnTo>
-                  <a:lnTo>
-                    <a:pt x="1432450" y="1205288"/>
-                  </a:lnTo>
-                  <a:lnTo>
-                    <a:pt x="1504073" y="1252792"/>
-                  </a:lnTo>
-                  <a:lnTo>
-                    <a:pt x="1575695" y="1299267"/>
-                  </a:lnTo>
-                  <a:lnTo>
-                    <a:pt x="1647318" y="1344736"/>
-                  </a:lnTo>
-                  <a:lnTo>
-                    <a:pt x="1718940" y="1389219"/>
-                  </a:lnTo>
-                  <a:lnTo>
-                    <a:pt x="1790563" y="1432739"/>
-                  </a:lnTo>
-                  <a:lnTo>
-                    <a:pt x="1862185" y="1475316"/>
-                  </a:lnTo>
-                  <a:lnTo>
-                    <a:pt x="1933808" y="1516970"/>
-                  </a:lnTo>
-                  <a:lnTo>
-                    <a:pt x="2005430" y="1557722"/>
-                  </a:lnTo>
-                  <a:lnTo>
-                    <a:pt x="2077053" y="1597592"/>
-                  </a:lnTo>
-                  <a:lnTo>
-                    <a:pt x="2148675" y="1636597"/>
-                  </a:lnTo>
-                  <a:lnTo>
-                    <a:pt x="2220298" y="1674758"/>
-                  </a:lnTo>
-                  <a:lnTo>
-                    <a:pt x="2291920" y="1712092"/>
-                  </a:lnTo>
-                  <a:lnTo>
-                    <a:pt x="2363543" y="1748617"/>
-                  </a:lnTo>
-                  <a:lnTo>
-                    <a:pt x="2435165" y="1784351"/>
-                  </a:lnTo>
-                  <a:lnTo>
-                    <a:pt x="2506788" y="1819311"/>
-                  </a:lnTo>
-                  <a:lnTo>
-                    <a:pt x="2578410" y="1853514"/>
-                  </a:lnTo>
-                  <a:lnTo>
-                    <a:pt x="2650033" y="1886975"/>
-                  </a:lnTo>
-                  <a:lnTo>
-                    <a:pt x="2721655" y="1919712"/>
-                  </a:lnTo>
-                  <a:lnTo>
-                    <a:pt x="2793278" y="1951740"/>
-                  </a:lnTo>
-                  <a:lnTo>
-                    <a:pt x="2864901" y="1983073"/>
-                  </a:lnTo>
-                  <a:lnTo>
-                    <a:pt x="2936523" y="2013728"/>
-                  </a:lnTo>
-                  <a:lnTo>
-                    <a:pt x="3008146" y="2043719"/>
-                  </a:lnTo>
-                  <a:lnTo>
-                    <a:pt x="3079768" y="2073060"/>
-                  </a:lnTo>
-                  <a:lnTo>
-                    <a:pt x="3151391" y="2101766"/>
-                  </a:lnTo>
-                  <a:lnTo>
-                    <a:pt x="3223013" y="2129850"/>
-                  </a:lnTo>
-                  <a:lnTo>
-                    <a:pt x="3294636" y="2157325"/>
-                  </a:lnTo>
-                  <a:lnTo>
-                    <a:pt x="3366258" y="2184205"/>
-                  </a:lnTo>
-                  <a:lnTo>
-                    <a:pt x="3437881" y="2210503"/>
-                  </a:lnTo>
-                  <a:lnTo>
-                    <a:pt x="3509503" y="2236231"/>
-                  </a:lnTo>
-                  <a:lnTo>
-                    <a:pt x="3581126" y="2261402"/>
-                  </a:lnTo>
-                  <a:lnTo>
-                    <a:pt x="3652748" y="2286027"/>
-                  </a:lnTo>
-                  <a:lnTo>
-                    <a:pt x="3724371" y="2310119"/>
-                  </a:lnTo>
-                  <a:lnTo>
-                    <a:pt x="3795993" y="2333689"/>
-                  </a:lnTo>
-                  <a:lnTo>
-                    <a:pt x="3867616" y="2356749"/>
-                  </a:lnTo>
-                  <a:lnTo>
-                    <a:pt x="3939238" y="2379309"/>
-                  </a:lnTo>
-                  <a:lnTo>
-                    <a:pt x="4010861" y="2401380"/>
-                  </a:lnTo>
-                  <a:lnTo>
-                    <a:pt x="4082483" y="2422973"/>
-                  </a:lnTo>
-                  <a:lnTo>
-                    <a:pt x="4154106" y="2444099"/>
-                  </a:lnTo>
-                  <a:lnTo>
-                    <a:pt x="4225729" y="2464766"/>
-                  </a:lnTo>
-                  <a:lnTo>
-                    <a:pt x="4297351" y="2484986"/>
-                  </a:lnTo>
-                  <a:lnTo>
-                    <a:pt x="4368974" y="2504768"/>
-                  </a:lnTo>
-                  <a:lnTo>
-                    <a:pt x="4440596" y="2524122"/>
-                  </a:lnTo>
-                  <a:lnTo>
-                    <a:pt x="4512219" y="2543056"/>
-                  </a:lnTo>
-                  <a:lnTo>
-                    <a:pt x="4583841" y="2561580"/>
-                  </a:lnTo>
-                  <a:lnTo>
-                    <a:pt x="4655464" y="2579703"/>
-                  </a:lnTo>
-                  <a:lnTo>
-                    <a:pt x="4727086" y="2597433"/>
-                  </a:lnTo>
-                  <a:lnTo>
-                    <a:pt x="4798709" y="2614779"/>
-                  </a:lnTo>
-                  <a:lnTo>
-                    <a:pt x="4870331" y="2631749"/>
-                  </a:lnTo>
-                  <a:lnTo>
-                    <a:pt x="4941954" y="2648352"/>
-                  </a:lnTo>
-                  <a:lnTo>
-                    <a:pt x="5013576" y="2664595"/>
-                  </a:lnTo>
-                  <a:lnTo>
-                    <a:pt x="5085199" y="2680486"/>
-                  </a:lnTo>
-                  <a:lnTo>
-                    <a:pt x="5156821" y="2696032"/>
-                  </a:lnTo>
-                  <a:lnTo>
-                    <a:pt x="5228444" y="2711243"/>
-                  </a:lnTo>
-                  <a:lnTo>
-                    <a:pt x="5300066" y="2726123"/>
-                  </a:lnTo>
-                  <a:lnTo>
-                    <a:pt x="5371689" y="2740681"/>
-                  </a:lnTo>
-                  <a:lnTo>
-                    <a:pt x="5443311" y="2754924"/>
-                  </a:lnTo>
-                  <a:lnTo>
-                    <a:pt x="5514934" y="2768858"/>
-                  </a:lnTo>
-                  <a:lnTo>
-                    <a:pt x="5586557" y="2782491"/>
-                  </a:lnTo>
-                  <a:lnTo>
-                    <a:pt x="5658179" y="2795828"/>
-                  </a:lnTo>
-                  <a:lnTo>
-                    <a:pt x="5729802" y="2808876"/>
-                  </a:lnTo>
-                  <a:lnTo>
-                    <a:pt x="5801424" y="2821641"/>
-                  </a:lnTo>
-                  <a:lnTo>
-                    <a:pt x="5873047" y="2834130"/>
-                  </a:lnTo>
-                  <a:lnTo>
-                    <a:pt x="5944669" y="2846349"/>
-                  </a:lnTo>
-                  <a:lnTo>
-                    <a:pt x="6016292" y="2858303"/>
-                  </a:lnTo>
-                  <a:lnTo>
-                    <a:pt x="6087914" y="2869997"/>
-                  </a:lnTo>
-                  <a:lnTo>
-                    <a:pt x="6159537" y="2881439"/>
-                  </a:lnTo>
-                  <a:lnTo>
-                    <a:pt x="6231159" y="2892632"/>
-                  </a:lnTo>
-                  <a:lnTo>
-                    <a:pt x="6302782" y="2903583"/>
-                  </a:lnTo>
-                  <a:lnTo>
-                    <a:pt x="6374404" y="2914297"/>
-                  </a:lnTo>
-                  <a:lnTo>
-                    <a:pt x="6446027" y="2924779"/>
-                  </a:lnTo>
-                  <a:lnTo>
-                    <a:pt x="6517649" y="2935034"/>
-                  </a:lnTo>
-                  <a:lnTo>
-                    <a:pt x="6589272" y="2945066"/>
-                  </a:lnTo>
-                  <a:lnTo>
-                    <a:pt x="6660894" y="2954881"/>
-                  </a:lnTo>
-                  <a:lnTo>
-                    <a:pt x="6732517" y="2964484"/>
-                  </a:lnTo>
-                  <a:lnTo>
-                    <a:pt x="6804139" y="2973879"/>
-                  </a:lnTo>
-                  <a:lnTo>
-                    <a:pt x="6875762" y="2983070"/>
-                  </a:lnTo>
-                  <a:lnTo>
-                    <a:pt x="6947385" y="2992061"/>
-                  </a:lnTo>
-                  <a:lnTo>
-                    <a:pt x="7019007" y="3000859"/>
-                  </a:lnTo>
-                  <a:lnTo>
-                    <a:pt x="7090630" y="3009465"/>
+                    <a:pt x="71622" y="73866"/>
+                  </a:lnTo>
+                  <a:lnTo>
+                    <a:pt x="143245" y="146133"/>
+                  </a:lnTo>
+                  <a:lnTo>
+                    <a:pt x="214867" y="216833"/>
+                  </a:lnTo>
+                  <a:lnTo>
+                    <a:pt x="286490" y="286001"/>
+                  </a:lnTo>
+                  <a:lnTo>
+                    <a:pt x="358112" y="353671"/>
+                  </a:lnTo>
+                  <a:lnTo>
+                    <a:pt x="429735" y="419875"/>
+                  </a:lnTo>
+                  <a:lnTo>
+                    <a:pt x="501357" y="484644"/>
+                  </a:lnTo>
+                  <a:lnTo>
+                    <a:pt x="572980" y="548009"/>
+                  </a:lnTo>
+                  <a:lnTo>
+                    <a:pt x="644602" y="610002"/>
+                  </a:lnTo>
+                  <a:lnTo>
+                    <a:pt x="716225" y="670651"/>
+                  </a:lnTo>
+                  <a:lnTo>
+                    <a:pt x="787847" y="729986"/>
+                  </a:lnTo>
+                  <a:lnTo>
+                    <a:pt x="859470" y="788035"/>
+                  </a:lnTo>
+                  <a:lnTo>
+                    <a:pt x="931092" y="844827"/>
+                  </a:lnTo>
+                  <a:lnTo>
+                    <a:pt x="1002715" y="900388"/>
+                  </a:lnTo>
+                  <a:lnTo>
+                    <a:pt x="1074337" y="954745"/>
+                  </a:lnTo>
+                  <a:lnTo>
+                    <a:pt x="1145960" y="1007924"/>
+                  </a:lnTo>
+                  <a:lnTo>
+                    <a:pt x="1217582" y="1059951"/>
+                  </a:lnTo>
+                  <a:lnTo>
+                    <a:pt x="1289205" y="1110851"/>
+                  </a:lnTo>
+                  <a:lnTo>
+                    <a:pt x="1360827" y="1160647"/>
+                  </a:lnTo>
+                  <a:lnTo>
+                    <a:pt x="1432450" y="1209365"/>
+                  </a:lnTo>
+                  <a:lnTo>
+                    <a:pt x="1504073" y="1257027"/>
+                  </a:lnTo>
+                  <a:lnTo>
+                    <a:pt x="1575695" y="1303657"/>
+                  </a:lnTo>
+                  <a:lnTo>
+                    <a:pt x="1647318" y="1349276"/>
+                  </a:lnTo>
+                  <a:lnTo>
+                    <a:pt x="1718940" y="1393906"/>
+                  </a:lnTo>
+                  <a:lnTo>
+                    <a:pt x="1790563" y="1437570"/>
+                  </a:lnTo>
+                  <a:lnTo>
+                    <a:pt x="1862185" y="1480287"/>
+                  </a:lnTo>
+                  <a:lnTo>
+                    <a:pt x="1933808" y="1522079"/>
+                  </a:lnTo>
+                  <a:lnTo>
+                    <a:pt x="2005430" y="1562965"/>
+                  </a:lnTo>
+                  <a:lnTo>
+                    <a:pt x="2077053" y="1602965"/>
+                  </a:lnTo>
+                  <a:lnTo>
+                    <a:pt x="2148675" y="1642099"/>
+                  </a:lnTo>
+                  <a:lnTo>
+                    <a:pt x="2220298" y="1680384"/>
+                  </a:lnTo>
+                  <a:lnTo>
+                    <a:pt x="2291920" y="1717840"/>
+                  </a:lnTo>
+                  <a:lnTo>
+                    <a:pt x="2363543" y="1754485"/>
+                  </a:lnTo>
+                  <a:lnTo>
+                    <a:pt x="2435165" y="1790335"/>
+                  </a:lnTo>
+                  <a:lnTo>
+                    <a:pt x="2506788" y="1825409"/>
+                  </a:lnTo>
+                  <a:lnTo>
+                    <a:pt x="2578410" y="1859722"/>
+                  </a:lnTo>
+                  <a:lnTo>
+                    <a:pt x="2650033" y="1893292"/>
+                  </a:lnTo>
+                  <a:lnTo>
+                    <a:pt x="2721655" y="1926135"/>
+                  </a:lnTo>
+                  <a:lnTo>
+                    <a:pt x="2793278" y="1958266"/>
+                  </a:lnTo>
+                  <a:lnTo>
+                    <a:pt x="2864901" y="1989701"/>
+                  </a:lnTo>
+                  <a:lnTo>
+                    <a:pt x="2936523" y="2020455"/>
+                  </a:lnTo>
+                  <a:lnTo>
+                    <a:pt x="3008146" y="2050542"/>
+                  </a:lnTo>
+                  <a:lnTo>
+                    <a:pt x="3079768" y="2079977"/>
+                  </a:lnTo>
+                  <a:lnTo>
+                    <a:pt x="3151391" y="2108775"/>
+                  </a:lnTo>
+                  <a:lnTo>
+                    <a:pt x="3223013" y="2136948"/>
+                  </a:lnTo>
+                  <a:lnTo>
+                    <a:pt x="3294636" y="2164512"/>
+                  </a:lnTo>
+                  <a:lnTo>
+                    <a:pt x="3366258" y="2191477"/>
+                  </a:lnTo>
+                  <a:lnTo>
+                    <a:pt x="3437881" y="2217859"/>
+                  </a:lnTo>
+                  <a:lnTo>
+                    <a:pt x="3509503" y="2243669"/>
+                  </a:lnTo>
+                  <a:lnTo>
+                    <a:pt x="3581126" y="2268920"/>
+                  </a:lnTo>
+                  <a:lnTo>
+                    <a:pt x="3652748" y="2293623"/>
+                  </a:lnTo>
+                  <a:lnTo>
+                    <a:pt x="3724371" y="2317791"/>
+                  </a:lnTo>
+                  <a:lnTo>
+                    <a:pt x="3795993" y="2341436"/>
+                  </a:lnTo>
+                  <a:lnTo>
+                    <a:pt x="3867616" y="2364568"/>
+                  </a:lnTo>
+                  <a:lnTo>
+                    <a:pt x="3939238" y="2387199"/>
+                  </a:lnTo>
+                  <a:lnTo>
+                    <a:pt x="4010861" y="2409340"/>
+                  </a:lnTo>
+                  <a:lnTo>
+                    <a:pt x="4082483" y="2431001"/>
+                  </a:lnTo>
+                  <a:lnTo>
+                    <a:pt x="4154106" y="2452192"/>
+                  </a:lnTo>
+                  <a:lnTo>
+                    <a:pt x="4225729" y="2472925"/>
+                  </a:lnTo>
+                  <a:lnTo>
+                    <a:pt x="4297351" y="2493208"/>
+                  </a:lnTo>
+                  <a:lnTo>
+                    <a:pt x="4368974" y="2513051"/>
+                  </a:lnTo>
+                  <a:lnTo>
+                    <a:pt x="4440596" y="2532465"/>
+                  </a:lnTo>
+                  <a:lnTo>
+                    <a:pt x="4512219" y="2551458"/>
+                  </a:lnTo>
+                  <a:lnTo>
+                    <a:pt x="4583841" y="2570039"/>
+                  </a:lnTo>
+                  <a:lnTo>
+                    <a:pt x="4655464" y="2588218"/>
+                  </a:lnTo>
+                  <a:lnTo>
+                    <a:pt x="4727086" y="2606003"/>
+                  </a:lnTo>
+                  <a:lnTo>
+                    <a:pt x="4798709" y="2623403"/>
+                  </a:lnTo>
+                  <a:lnTo>
+                    <a:pt x="4870331" y="2640425"/>
+                  </a:lnTo>
+                  <a:lnTo>
+                    <a:pt x="4941954" y="2657079"/>
+                  </a:lnTo>
+                  <a:lnTo>
+                    <a:pt x="5013576" y="2673372"/>
+                  </a:lnTo>
+                  <a:lnTo>
+                    <a:pt x="5085199" y="2689311"/>
+                  </a:lnTo>
+                  <a:lnTo>
+                    <a:pt x="5156821" y="2704906"/>
+                  </a:lnTo>
+                  <a:lnTo>
+                    <a:pt x="5228444" y="2720162"/>
+                  </a:lnTo>
+                  <a:lnTo>
+                    <a:pt x="5300066" y="2735088"/>
+                  </a:lnTo>
+                  <a:lnTo>
+                    <a:pt x="5371689" y="2749691"/>
+                  </a:lnTo>
+                  <a:lnTo>
+                    <a:pt x="5443311" y="2763977"/>
+                  </a:lnTo>
+                  <a:lnTo>
+                    <a:pt x="5514934" y="2777954"/>
+                  </a:lnTo>
+                  <a:lnTo>
+                    <a:pt x="5586557" y="2791627"/>
+                  </a:lnTo>
+                  <a:lnTo>
+                    <a:pt x="5658179" y="2805005"/>
+                  </a:lnTo>
+                  <a:lnTo>
+                    <a:pt x="5729802" y="2818092"/>
+                  </a:lnTo>
+                  <a:lnTo>
+                    <a:pt x="5801424" y="2830896"/>
+                  </a:lnTo>
+                  <a:lnTo>
+                    <a:pt x="5873047" y="2843423"/>
+                  </a:lnTo>
+                  <a:lnTo>
+                    <a:pt x="5944669" y="2855678"/>
+                  </a:lnTo>
+                  <a:lnTo>
+                    <a:pt x="6016292" y="2867667"/>
+                  </a:lnTo>
+                  <a:lnTo>
+                    <a:pt x="6087914" y="2879397"/>
+                  </a:lnTo>
+                  <a:lnTo>
+                    <a:pt x="6159537" y="2890873"/>
+                  </a:lnTo>
+                  <a:lnTo>
+                    <a:pt x="6231159" y="2902100"/>
+                  </a:lnTo>
+                  <a:lnTo>
+                    <a:pt x="6302782" y="2913083"/>
+                  </a:lnTo>
+                  <a:lnTo>
+                    <a:pt x="6374404" y="2923829"/>
+                  </a:lnTo>
+                  <a:lnTo>
+                    <a:pt x="6446027" y="2934342"/>
+                  </a:lnTo>
+                  <a:lnTo>
+                    <a:pt x="6517649" y="2944627"/>
+                  </a:lnTo>
+                  <a:lnTo>
+                    <a:pt x="6589272" y="2954689"/>
+                  </a:lnTo>
+                  <a:lnTo>
+                    <a:pt x="6660894" y="2964533"/>
+                  </a:lnTo>
+                  <a:lnTo>
+                    <a:pt x="6732517" y="2974164"/>
+                  </a:lnTo>
+                  <a:lnTo>
+                    <a:pt x="6804139" y="2983586"/>
+                  </a:lnTo>
+                  <a:lnTo>
+                    <a:pt x="6875762" y="2992804"/>
+                  </a:lnTo>
+                  <a:lnTo>
+                    <a:pt x="6947385" y="3001823"/>
+                  </a:lnTo>
+                  <a:lnTo>
+                    <a:pt x="7019007" y="3010646"/>
+                  </a:lnTo>
+                  <a:lnTo>
+                    <a:pt x="7090630" y="3019277"/>
                   </a:lnTo>
                 </a:path>
               </a:pathLst>
@@ -4412,7 +4412,7 @@
           </p:nvSpPr>
           <p:spPr>
             <a:xfrm>
-              <a:off x="5783789" y="2073503"/>
+              <a:off x="5793129" y="2073503"/>
               <a:ext cx="0" cy="3649639"/>
             </a:xfrm>
             <a:custGeom>
@@ -4455,7 +4455,7 @@
           </p:nvSpPr>
           <p:spPr>
             <a:xfrm>
-              <a:off x="4658599" y="2073503"/>
+              <a:off x="4667548" y="2073503"/>
               <a:ext cx="0" cy="3649639"/>
             </a:xfrm>
             <a:custGeom>
@@ -4498,7 +4498,7 @@
           </p:nvSpPr>
           <p:spPr>
             <a:xfrm>
-              <a:off x="6864197" y="2073503"/>
+              <a:off x="6868063" y="2073503"/>
               <a:ext cx="0" cy="3649639"/>
             </a:xfrm>
             <a:custGeom>
@@ -4771,7 +4771,7 @@
           </p:nvSpPr>
           <p:spPr>
             <a:xfrm>
-              <a:off x="3120823" y="5785772"/>
+              <a:off x="3120990" y="5785772"/>
               <a:ext cx="161574" cy="80101"/>
             </a:xfrm>
             <a:prstGeom prst="rect">
@@ -4817,7 +4817,7 @@
           </p:nvSpPr>
           <p:spPr>
             <a:xfrm>
-              <a:off x="5688698" y="5785772"/>
+              <a:off x="5688107" y="5785772"/>
               <a:ext cx="62179" cy="80101"/>
             </a:xfrm>
             <a:prstGeom prst="rect">
@@ -4863,7 +4863,7 @@
           </p:nvSpPr>
           <p:spPr>
             <a:xfrm>
-              <a:off x="8175787" y="5785772"/>
+              <a:off x="8174437" y="5785772"/>
               <a:ext cx="124358" cy="80101"/>
             </a:xfrm>
             <a:prstGeom prst="rect">
@@ -5034,7 +5034,7 @@
                   <a:latin typeface="Helvetica"/>
                   <a:cs typeface="Helvetica"/>
                 </a:rPr>
-                <a:t>subHR per 10 mL/min decline: 1.36 (1.06-1.74), p_Bonf = 0.085 (n = 6)  |  per IQR decline (Δ = 21.9): 1.96 (1.15-3.36)  |  IQR: [-10.5, 11.4]</a:t>
+                <a:t>subHR per 10 mL/min decline: 1.36 (1.07-1.73), p_Bonf = 0.072 (n = 6)  |  per IQR decline (Δ = 21.9): 1.96 (1.16-3.31)  |  IQR: [-10.4, 11.4]</a:t>
               </a:r>
             </a:p>
           </p:txBody>
